--- a/docs/AI赋能DBA创新实践汇报PPT.pptx
+++ b/docs/AI赋能DBA创新实践汇报PPT.pptx
@@ -137,6 +137,2961 @@
     </a:lvl9pPr>
   </p:defaultTextStyle>
 </p:presentation>
+</file>
+
+<file path=ppt/notesMasters/notesMaster1.xml><?xml version="1.0" encoding="utf-8"?>
+<p:notesMaster xmlns:a="http://schemas.openxmlformats.org/drawingml/2006/main" xmlns:p="http://schemas.openxmlformats.org/presentationml/2006/main" xmlns:r="http://schemas.openxmlformats.org/officeDocument/2006/relationships">
+  <p:cSld>
+    <p:bg>
+      <p:bgRef idx="1001">
+        <a:schemeClr val="bg1"/>
+      </p:bgRef>
+    </p:bg>
+    <p:spTree>
+      <p:nvGrpSpPr>
+        <p:cNvPr id="1" name=""/>
+        <p:cNvGrpSpPr/>
+        <p:nvPr/>
+      </p:nvGrpSpPr>
+      <p:grpSpPr>
+        <a:xfrm>
+          <a:off x="0" y="0"/>
+          <a:ext cx="0" cy="0"/>
+          <a:chOff x="0" y="0"/>
+          <a:chExt cx="0" cy="0"/>
+        </a:xfrm>
+      </p:grpSpPr>
+      <p:sp>
+        <p:nvSpPr>
+          <p:cNvPr id="2" name="Header Placeholder 1"/>
+          <p:cNvSpPr>
+            <a:spLocks noGrp="1"/>
+          </p:cNvSpPr>
+          <p:nvPr>
+            <p:ph type="hdr" sz="quarter"/>
+          </p:nvPr>
+        </p:nvSpPr>
+        <p:spPr>
+          <a:xfrm>
+            <a:off x="0" y="0"/>
+            <a:ext cx="2971800" cy="457200"/>
+          </a:xfrm>
+          <a:prstGeom prst="rect">
+            <a:avLst/>
+          </a:prstGeom>
+        </p:spPr>
+        <p:txBody>
+          <a:bodyPr vert="horz" lIns="91440" tIns="45720" rIns="91440" bIns="45720" rtlCol="0"/>
+          <a:lstStyle>
+            <a:lvl1pPr algn="l">
+              <a:defRPr sz="1200"/>
+            </a:lvl1pPr>
+          </a:lstStyle>
+          <a:p>
+            <a:endParaRPr lang="en-US"/>
+          </a:p>
+        </p:txBody>
+      </p:sp>
+      <p:sp>
+        <p:nvSpPr>
+          <p:cNvPr id="3" name="Date Placeholder 2"/>
+          <p:cNvSpPr>
+            <a:spLocks noGrp="1"/>
+          </p:cNvSpPr>
+          <p:nvPr>
+            <p:ph type="dt" idx="1"/>
+          </p:nvPr>
+        </p:nvSpPr>
+        <p:spPr>
+          <a:xfrm>
+            <a:off x="3884613" y="0"/>
+            <a:ext cx="2971800" cy="457200"/>
+          </a:xfrm>
+          <a:prstGeom prst="rect">
+            <a:avLst/>
+          </a:prstGeom>
+        </p:spPr>
+        <p:txBody>
+          <a:bodyPr vert="horz" lIns="91440" tIns="45720" rIns="91440" bIns="45720" rtlCol="0"/>
+          <a:lstStyle>
+            <a:lvl1pPr algn="r">
+              <a:defRPr sz="1200"/>
+            </a:lvl1pPr>
+          </a:lstStyle>
+          <a:p>
+            <a:fld id="{0F89C1C7-3DCD-1040-A9CF-14679D8B5DDD}" type="datetimeFigureOut">
+              <a:rPr lang="en-US" smtClean="0"/>
+              <a:t>10/17/16</a:t>
+            </a:fld>
+            <a:endParaRPr lang="en-US"/>
+          </a:p>
+        </p:txBody>
+      </p:sp>
+      <p:sp>
+        <p:nvSpPr>
+          <p:cNvPr id="4" name="Slide Image Placeholder 3"/>
+          <p:cNvSpPr>
+            <a:spLocks noGrp="1" noRot="1" noChangeAspect="1"/>
+          </p:cNvSpPr>
+          <p:nvPr>
+            <p:ph type="sldImg" idx="2"/>
+          </p:nvPr>
+        </p:nvSpPr>
+        <p:spPr>
+          <a:xfrm>
+            <a:off x="1143000" y="685800"/>
+            <a:ext cx="4572000" cy="3429000"/>
+          </a:xfrm>
+          <a:prstGeom prst="rect">
+            <a:avLst/>
+          </a:prstGeom>
+          <a:noFill/>
+          <a:ln w="12700">
+            <a:solidFill>
+              <a:prstClr val="black"/>
+            </a:solidFill>
+          </a:ln>
+        </p:spPr>
+        <p:txBody>
+          <a:bodyPr vert="horz" lIns="91440" tIns="45720" rIns="91440" bIns="45720" rtlCol="0" anchor="ctr"/>
+          <a:lstStyle/>
+          <a:p>
+            <a:endParaRPr lang="en-US"/>
+          </a:p>
+        </p:txBody>
+      </p:sp>
+      <p:sp>
+        <p:nvSpPr>
+          <p:cNvPr id="5" name="Notes Placeholder 4"/>
+          <p:cNvSpPr>
+            <a:spLocks noGrp="1"/>
+          </p:cNvSpPr>
+          <p:nvPr>
+            <p:ph type="body" sz="quarter" idx="3"/>
+          </p:nvPr>
+        </p:nvSpPr>
+        <p:spPr>
+          <a:xfrm>
+            <a:off x="685800" y="4343400"/>
+            <a:ext cx="5486400" cy="4114800"/>
+          </a:xfrm>
+          <a:prstGeom prst="rect">
+            <a:avLst/>
+          </a:prstGeom>
+        </p:spPr>
+        <p:txBody>
+          <a:bodyPr vert="horz" lIns="91440" tIns="45720" rIns="91440" bIns="45720" rtlCol="0"/>
+          <a:lstStyle/>
+          <a:p>
+            <a:pPr lvl="0"/>
+            <a:r>
+              <a:rPr lang="en-US" smtClean="0"/>
+              <a:t>Click to edit Master text styles</a:t>
+            </a:r>
+          </a:p>
+          <a:p>
+            <a:pPr lvl="1"/>
+            <a:r>
+              <a:rPr lang="en-US" smtClean="0"/>
+              <a:t>Second level</a:t>
+            </a:r>
+          </a:p>
+          <a:p>
+            <a:pPr lvl="2"/>
+            <a:r>
+              <a:rPr lang="en-US" smtClean="0"/>
+              <a:t>Third level</a:t>
+            </a:r>
+          </a:p>
+          <a:p>
+            <a:pPr lvl="3"/>
+            <a:r>
+              <a:rPr lang="en-US" smtClean="0"/>
+              <a:t>Fourth level</a:t>
+            </a:r>
+          </a:p>
+          <a:p>
+            <a:pPr lvl="4"/>
+            <a:r>
+              <a:rPr lang="en-US" smtClean="0"/>
+              <a:t>Fifth level</a:t>
+            </a:r>
+            <a:endParaRPr lang="en-US"/>
+          </a:p>
+        </p:txBody>
+      </p:sp>
+      <p:sp>
+        <p:nvSpPr>
+          <p:cNvPr id="6" name="Footer Placeholder 5"/>
+          <p:cNvSpPr>
+            <a:spLocks noGrp="1"/>
+          </p:cNvSpPr>
+          <p:nvPr>
+            <p:ph type="ftr" sz="quarter" idx="4"/>
+          </p:nvPr>
+        </p:nvSpPr>
+        <p:spPr>
+          <a:xfrm>
+            <a:off x="0" y="8685213"/>
+            <a:ext cx="2971800" cy="457200"/>
+          </a:xfrm>
+          <a:prstGeom prst="rect">
+            <a:avLst/>
+          </a:prstGeom>
+        </p:spPr>
+        <p:txBody>
+          <a:bodyPr vert="horz" lIns="91440" tIns="45720" rIns="91440" bIns="45720" rtlCol="0" anchor="b"/>
+          <a:lstStyle>
+            <a:lvl1pPr algn="l">
+              <a:defRPr sz="1200"/>
+            </a:lvl1pPr>
+          </a:lstStyle>
+          <a:p>
+            <a:endParaRPr lang="en-US"/>
+          </a:p>
+        </p:txBody>
+      </p:sp>
+      <p:sp>
+        <p:nvSpPr>
+          <p:cNvPr id="7" name="Slide Number Placeholder 6"/>
+          <p:cNvSpPr>
+            <a:spLocks noGrp="1"/>
+          </p:cNvSpPr>
+          <p:nvPr>
+            <p:ph type="sldNum" sz="quarter" idx="5"/>
+          </p:nvPr>
+        </p:nvSpPr>
+        <p:spPr>
+          <a:xfrm>
+            <a:off x="3884613" y="8685213"/>
+            <a:ext cx="2971800" cy="457200"/>
+          </a:xfrm>
+          <a:prstGeom prst="rect">
+            <a:avLst/>
+          </a:prstGeom>
+        </p:spPr>
+        <p:txBody>
+          <a:bodyPr vert="horz" lIns="91440" tIns="45720" rIns="91440" bIns="45720" rtlCol="0" anchor="b"/>
+          <a:lstStyle>
+            <a:lvl1pPr algn="r">
+              <a:defRPr sz="1200"/>
+            </a:lvl1pPr>
+          </a:lstStyle>
+          <a:p>
+            <a:fld id="{BB5E49A5-4136-284D-997B-48E1D791AD67}" type="slidenum">
+              <a:rPr lang="en-US" smtClean="0"/>
+              <a:t>‹#›</a:t>
+            </a:fld>
+            <a:endParaRPr lang="en-US"/>
+          </a:p>
+        </p:txBody>
+      </p:sp>
+    </p:spTree>
+    <p:extLst>
+      <p:ext uri="{BB962C8B-B14F-4D97-AF65-F5344CB8AC3E}">
+        <p14:creationId xmlns:p14="http://schemas.microsoft.com/office/powerpoint/2010/main" val="2623252185"/>
+      </p:ext>
+    </p:extLst>
+  </p:cSld>
+  <p:clrMap bg1="lt1" tx1="dk1" bg2="lt2" tx2="dk2" accent1="accent1" accent2="accent2" accent3="accent3" accent4="accent4" accent5="accent5" accent6="accent6" hlink="hlink" folHlink="folHlink"/>
+  <p:notesStyle>
+    <a:lvl1pPr marL="0" algn="l" defTabSz="457200" rtl="0" eaLnBrk="1" latinLnBrk="0" hangingPunct="1">
+      <a:defRPr sz="1200" kern="1200">
+        <a:solidFill>
+          <a:schemeClr val="tx1"/>
+        </a:solidFill>
+        <a:latin typeface="+mn-lt"/>
+        <a:ea typeface="+mn-ea"/>
+        <a:cs typeface="+mn-cs"/>
+      </a:defRPr>
+    </a:lvl1pPr>
+    <a:lvl2pPr marL="457200" algn="l" defTabSz="457200" rtl="0" eaLnBrk="1" latinLnBrk="0" hangingPunct="1">
+      <a:defRPr sz="1200" kern="1200">
+        <a:solidFill>
+          <a:schemeClr val="tx1"/>
+        </a:solidFill>
+        <a:latin typeface="+mn-lt"/>
+        <a:ea typeface="+mn-ea"/>
+        <a:cs typeface="+mn-cs"/>
+      </a:defRPr>
+    </a:lvl2pPr>
+    <a:lvl3pPr marL="914400" algn="l" defTabSz="457200" rtl="0" eaLnBrk="1" latinLnBrk="0" hangingPunct="1">
+      <a:defRPr sz="1200" kern="1200">
+        <a:solidFill>
+          <a:schemeClr val="tx1"/>
+        </a:solidFill>
+        <a:latin typeface="+mn-lt"/>
+        <a:ea typeface="+mn-ea"/>
+        <a:cs typeface="+mn-cs"/>
+      </a:defRPr>
+    </a:lvl3pPr>
+    <a:lvl4pPr marL="1371600" algn="l" defTabSz="457200" rtl="0" eaLnBrk="1" latinLnBrk="0" hangingPunct="1">
+      <a:defRPr sz="1200" kern="1200">
+        <a:solidFill>
+          <a:schemeClr val="tx1"/>
+        </a:solidFill>
+        <a:latin typeface="+mn-lt"/>
+        <a:ea typeface="+mn-ea"/>
+        <a:cs typeface="+mn-cs"/>
+      </a:defRPr>
+    </a:lvl4pPr>
+    <a:lvl5pPr marL="1828800" algn="l" defTabSz="457200" rtl="0" eaLnBrk="1" latinLnBrk="0" hangingPunct="1">
+      <a:defRPr sz="1200" kern="1200">
+        <a:solidFill>
+          <a:schemeClr val="tx1"/>
+        </a:solidFill>
+        <a:latin typeface="+mn-lt"/>
+        <a:ea typeface="+mn-ea"/>
+        <a:cs typeface="+mn-cs"/>
+      </a:defRPr>
+    </a:lvl5pPr>
+    <a:lvl6pPr marL="2286000" algn="l" defTabSz="457200" rtl="0" eaLnBrk="1" latinLnBrk="0" hangingPunct="1">
+      <a:defRPr sz="1200" kern="1200">
+        <a:solidFill>
+          <a:schemeClr val="tx1"/>
+        </a:solidFill>
+        <a:latin typeface="+mn-lt"/>
+        <a:ea typeface="+mn-ea"/>
+        <a:cs typeface="+mn-cs"/>
+      </a:defRPr>
+    </a:lvl6pPr>
+    <a:lvl7pPr marL="2743200" algn="l" defTabSz="457200" rtl="0" eaLnBrk="1" latinLnBrk="0" hangingPunct="1">
+      <a:defRPr sz="1200" kern="1200">
+        <a:solidFill>
+          <a:schemeClr val="tx1"/>
+        </a:solidFill>
+        <a:latin typeface="+mn-lt"/>
+        <a:ea typeface="+mn-ea"/>
+        <a:cs typeface="+mn-cs"/>
+      </a:defRPr>
+    </a:lvl7pPr>
+    <a:lvl8pPr marL="3200400" algn="l" defTabSz="457200" rtl="0" eaLnBrk="1" latinLnBrk="0" hangingPunct="1">
+      <a:defRPr sz="1200" kern="1200">
+        <a:solidFill>
+          <a:schemeClr val="tx1"/>
+        </a:solidFill>
+        <a:latin typeface="+mn-lt"/>
+        <a:ea typeface="+mn-ea"/>
+        <a:cs typeface="+mn-cs"/>
+      </a:defRPr>
+    </a:lvl8pPr>
+    <a:lvl9pPr marL="3657600" algn="l" defTabSz="457200" rtl="0" eaLnBrk="1" latinLnBrk="0" hangingPunct="1">
+      <a:defRPr sz="1200" kern="1200">
+        <a:solidFill>
+          <a:schemeClr val="tx1"/>
+        </a:solidFill>
+        <a:latin typeface="+mn-lt"/>
+        <a:ea typeface="+mn-ea"/>
+        <a:cs typeface="+mn-cs"/>
+      </a:defRPr>
+    </a:lvl9pPr>
+  </p:notesStyle>
+</p:notesMaster>
+</file>
+
+<file path=ppt/notesSlides/notesSlide1.xml><?xml version="1.0" encoding="utf-8"?>
+<p:notes xmlns:a="http://schemas.openxmlformats.org/drawingml/2006/main" xmlns:p="http://schemas.openxmlformats.org/presentationml/2006/main" xmlns:r="http://schemas.openxmlformats.org/officeDocument/2006/relationships">
+  <p:cSld>
+    <p:spTree>
+      <p:nvGrpSpPr>
+        <p:cNvPr id="1" name=""/>
+        <p:cNvGrpSpPr/>
+        <p:nvPr/>
+      </p:nvGrpSpPr>
+      <p:grpSpPr>
+        <a:xfrm>
+          <a:off x="0" y="0"/>
+          <a:ext cx="0" cy="0"/>
+          <a:chOff x="0" y="0"/>
+          <a:chExt cx="0" cy="0"/>
+        </a:xfrm>
+      </p:grpSpPr>
+      <p:sp>
+        <p:nvSpPr>
+          <p:cNvPr id="2" name="Slide Image Placeholder 1"/>
+          <p:cNvSpPr>
+            <a:spLocks noGrp="1"/>
+          </p:cNvSpPr>
+          <p:nvPr>
+            <p:ph type="sldImg" idx="2"/>
+          </p:nvPr>
+        </p:nvSpPr>
+        <p:spPr/>
+      </p:sp>
+      <p:sp>
+        <p:nvSpPr>
+          <p:cNvPr id="3" name="Notes Placeholder 2"/>
+          <p:cNvSpPr>
+            <a:spLocks noGrp="1"/>
+          </p:cNvSpPr>
+          <p:nvPr>
+            <p:ph type="body" idx="3" sz="quarter"/>
+          </p:nvPr>
+        </p:nvSpPr>
+        <p:spPr/>
+        <p:txBody>
+          <a:bodyPr/>
+          <a:lstStyle/>
+          <a:p>
+            <a:r>
+              <a:t>各位领导、各位同事，大家好。（若为代讲：受林桑同志委托，我代表他向大家汇报。）今天汇报的题目是——一个人加AI，等于一个生产力团队。</a:t>
+            </a:r>
+          </a:p>
+          <a:p>
+            <a:r>
+              <a:t>过去八周，我作为一名DBA，在不写一行代码的情况下，指挥三个AI智能体，从零开发出了一套企业级的TDSQL数据库SQL审核工具，现在已经具备上线条件。大家看屏幕下方这四个数字：八周从零到上线、119条审核规则、880项自动化测试，而我本人手写的代码——是零行。</a:t>
+            </a:r>
+          </a:p>
+          <a:p>
+            <a:r>
+              <a:t>今天我想向大家汇报的，不只是这个工具本身，更是这套"人指挥AI"的工作方法。</a:t>
+            </a:r>
+          </a:p>
+        </p:txBody>
+      </p:sp>
+      <p:sp>
+        <p:nvSpPr>
+          <p:cNvPr id="4" name="Slide Number Placeholder 3"/>
+          <p:cNvSpPr>
+            <a:spLocks noGrp="1"/>
+          </p:cNvSpPr>
+          <p:nvPr>
+            <p:ph type="sldNum" idx="5" sz="quarter"/>
+          </p:nvPr>
+        </p:nvSpPr>
+        <p:spPr/>
+      </p:sp>
+    </p:spTree>
+  </p:cSld>
+  <p:clrMapOvr>
+    <a:masterClrMapping/>
+  </p:clrMapOvr>
+</p:notes>
+</file>
+
+<file path=ppt/notesSlides/notesSlide10.xml><?xml version="1.0" encoding="utf-8"?>
+<p:notes xmlns:a="http://schemas.openxmlformats.org/drawingml/2006/main" xmlns:p="http://schemas.openxmlformats.org/presentationml/2006/main" xmlns:r="http://schemas.openxmlformats.org/officeDocument/2006/relationships">
+  <p:cSld>
+    <p:spTree>
+      <p:nvGrpSpPr>
+        <p:cNvPr id="1" name=""/>
+        <p:cNvGrpSpPr/>
+        <p:nvPr/>
+      </p:nvGrpSpPr>
+      <p:grpSpPr>
+        <a:xfrm>
+          <a:off x="0" y="0"/>
+          <a:ext cx="0" cy="0"/>
+          <a:chOff x="0" y="0"/>
+          <a:chExt cx="0" cy="0"/>
+        </a:xfrm>
+      </p:grpSpPr>
+      <p:sp>
+        <p:nvSpPr>
+          <p:cNvPr id="2" name="Slide Image Placeholder 1"/>
+          <p:cNvSpPr>
+            <a:spLocks noGrp="1"/>
+          </p:cNvSpPr>
+          <p:nvPr>
+            <p:ph type="sldImg" idx="2"/>
+          </p:nvPr>
+        </p:nvSpPr>
+        <p:spPr/>
+      </p:sp>
+      <p:sp>
+        <p:nvSpPr>
+          <p:cNvPr id="3" name="Notes Placeholder 2"/>
+          <p:cNvSpPr>
+            <a:spLocks noGrp="1"/>
+          </p:cNvSpPr>
+          <p:nvPr>
+            <p:ph type="body" idx="3" sz="quarter"/>
+          </p:nvPr>
+        </p:nvSpPr>
+        <p:spPr/>
+        <p:txBody>
+          <a:bodyPr/>
+          <a:lstStyle/>
+          <a:p>
+            <a:r>
+              <a:t>在几十轮交互中，我沉淀出一套固定打法，叫五步交互方法论。</a:t>
+            </a:r>
+          </a:p>
+          <a:p>
+            <a:r>
+              <a:t>第一步，专家定义——我先想清楚，输出设计思想和业务需求；第二步，AI设计——设计智能体把需求变成详细设计说明书；第三步，AI实现——编码智能体严格按说明书编码；第四步，AI测试——测试智能体独立验证、揭示缺陷；第五步，闭环修复——我审报告、做裁决、指挥修复，然后再来一轮复验。</a:t>
+            </a:r>
+          </a:p>
+          <a:p>
+            <a:r>
+              <a:t>注意中间这行金色的字：循环迭代，直到质检通过准出。项目里最多的一个模块循环了四轮，最终零缺陷上线。这套流程看着慢，实际是最快的路，因为它避免了方向性返工。</a:t>
+            </a:r>
+          </a:p>
+        </p:txBody>
+      </p:sp>
+      <p:sp>
+        <p:nvSpPr>
+          <p:cNvPr id="4" name="Slide Number Placeholder 3"/>
+          <p:cNvSpPr>
+            <a:spLocks noGrp="1"/>
+          </p:cNvSpPr>
+          <p:nvPr>
+            <p:ph type="sldNum" idx="5" sz="quarter"/>
+          </p:nvPr>
+        </p:nvSpPr>
+        <p:spPr/>
+      </p:sp>
+    </p:spTree>
+  </p:cSld>
+  <p:clrMapOvr>
+    <a:masterClrMapping/>
+  </p:clrMapOvr>
+</p:notes>
+</file>
+
+<file path=ppt/notesSlides/notesSlide11.xml><?xml version="1.0" encoding="utf-8"?>
+<p:notes xmlns:a="http://schemas.openxmlformats.org/drawingml/2006/main" xmlns:p="http://schemas.openxmlformats.org/presentationml/2006/main" xmlns:r="http://schemas.openxmlformats.org/officeDocument/2006/relationships">
+  <p:cSld>
+    <p:spTree>
+      <p:nvGrpSpPr>
+        <p:cNvPr id="1" name=""/>
+        <p:cNvGrpSpPr/>
+        <p:nvPr/>
+      </p:nvGrpSpPr>
+      <p:grpSpPr>
+        <a:xfrm>
+          <a:off x="0" y="0"/>
+          <a:ext cx="0" cy="0"/>
+          <a:chOff x="0" y="0"/>
+          <a:chExt cx="0" cy="0"/>
+        </a:xfrm>
+      </p:grpSpPr>
+      <p:sp>
+        <p:nvSpPr>
+          <p:cNvPr id="2" name="Slide Image Placeholder 1"/>
+          <p:cNvSpPr>
+            <a:spLocks noGrp="1"/>
+          </p:cNvSpPr>
+          <p:nvPr>
+            <p:ph type="sldImg" idx="2"/>
+          </p:nvPr>
+        </p:nvSpPr>
+        <p:spPr/>
+      </p:sp>
+      <p:sp>
+        <p:nvSpPr>
+          <p:cNvPr id="3" name="Notes Placeholder 2"/>
+          <p:cNvSpPr>
+            <a:spLocks noGrp="1"/>
+          </p:cNvSpPr>
+          <p:nvPr>
+            <p:ph type="body" idx="3" sz="quarter"/>
+          </p:nvPr>
+        </p:nvSpPr>
+        <p:spPr/>
+        <p:txBody>
+          <a:bodyPr/>
+          <a:lstStyle/>
+          <a:p>
+            <a:r>
+              <a:t>这一页讲质量的秘密：制衡，而不是信任。</a:t>
+            </a:r>
+          </a:p>
+          <a:p>
+            <a:r>
+              <a:t>给大家讲真实的一幕：有一轮，编码智能体报告说"已完成开发并自测通过"。结果质检验收一查，十九个页面里十一个是空壳子。从那以后我定了一条铁的规矩：AI说做完了，不算数；必须经过独立验证，再由我做最终裁决，才算数。</a:t>
+            </a:r>
+          </a:p>
+          <a:p>
+            <a:r>
+              <a:t>大家看这个结构：三个智能体互相制衡，所有报告最后汇到我这里，由我逐条审核、确认根因、决定是准出还是打回整改。质量，就是这么管出来的。</a:t>
+            </a:r>
+          </a:p>
+        </p:txBody>
+      </p:sp>
+      <p:sp>
+        <p:nvSpPr>
+          <p:cNvPr id="4" name="Slide Number Placeholder 3"/>
+          <p:cNvSpPr>
+            <a:spLocks noGrp="1"/>
+          </p:cNvSpPr>
+          <p:nvPr>
+            <p:ph type="sldNum" idx="5" sz="quarter"/>
+          </p:nvPr>
+        </p:nvSpPr>
+        <p:spPr/>
+      </p:sp>
+    </p:spTree>
+  </p:cSld>
+  <p:clrMapOvr>
+    <a:masterClrMapping/>
+  </p:clrMapOvr>
+</p:notes>
+</file>
+
+<file path=ppt/notesSlides/notesSlide12.xml><?xml version="1.0" encoding="utf-8"?>
+<p:notes xmlns:a="http://schemas.openxmlformats.org/drawingml/2006/main" xmlns:p="http://schemas.openxmlformats.org/presentationml/2006/main" xmlns:r="http://schemas.openxmlformats.org/officeDocument/2006/relationships">
+  <p:cSld>
+    <p:spTree>
+      <p:nvGrpSpPr>
+        <p:cNvPr id="1" name=""/>
+        <p:cNvGrpSpPr/>
+        <p:nvPr/>
+      </p:nvGrpSpPr>
+      <p:grpSpPr>
+        <a:xfrm>
+          <a:off x="0" y="0"/>
+          <a:ext cx="0" cy="0"/>
+          <a:chOff x="0" y="0"/>
+          <a:chExt cx="0" cy="0"/>
+        </a:xfrm>
+      </p:grpSpPr>
+      <p:sp>
+        <p:nvSpPr>
+          <p:cNvPr id="2" name="Slide Image Placeholder 1"/>
+          <p:cNvSpPr>
+            <a:spLocks noGrp="1"/>
+          </p:cNvSpPr>
+          <p:nvPr>
+            <p:ph type="sldImg" idx="2"/>
+          </p:nvPr>
+        </p:nvSpPr>
+        <p:spPr/>
+      </p:sp>
+      <p:sp>
+        <p:nvSpPr>
+          <p:cNvPr id="3" name="Notes Placeholder 2"/>
+          <p:cNvSpPr>
+            <a:spLocks noGrp="1"/>
+          </p:cNvSpPr>
+          <p:nvPr>
+            <p:ph type="body" idx="3" sz="quarter"/>
+          </p:nvPr>
+        </p:nvSpPr>
+        <p:spPr/>
+        <p:txBody>
+          <a:bodyPr/>
+          <a:lstStyle/>
+          <a:p>
+            <a:r>
+              <a:t>第三部分，实战历程。八周、七个阶段、六十二次代码提交——下面带大家快速走一遍这条从零到上线的路。</a:t>
+            </a:r>
+          </a:p>
+        </p:txBody>
+      </p:sp>
+      <p:sp>
+        <p:nvSpPr>
+          <p:cNvPr id="4" name="Slide Number Placeholder 3"/>
+          <p:cNvSpPr>
+            <a:spLocks noGrp="1"/>
+          </p:cNvSpPr>
+          <p:nvPr>
+            <p:ph type="sldNum" idx="5" sz="quarter"/>
+          </p:nvPr>
+        </p:nvSpPr>
+        <p:spPr/>
+      </p:sp>
+    </p:spTree>
+  </p:cSld>
+  <p:clrMapOvr>
+    <a:masterClrMapping/>
+  </p:clrMapOvr>
+</p:notes>
+</file>
+
+<file path=ppt/notesSlides/notesSlide13.xml><?xml version="1.0" encoding="utf-8"?>
+<p:notes xmlns:a="http://schemas.openxmlformats.org/drawingml/2006/main" xmlns:p="http://schemas.openxmlformats.org/presentationml/2006/main" xmlns:r="http://schemas.openxmlformats.org/officeDocument/2006/relationships">
+  <p:cSld>
+    <p:spTree>
+      <p:nvGrpSpPr>
+        <p:cNvPr id="1" name=""/>
+        <p:cNvGrpSpPr/>
+        <p:nvPr/>
+      </p:nvGrpSpPr>
+      <p:grpSpPr>
+        <a:xfrm>
+          <a:off x="0" y="0"/>
+          <a:ext cx="0" cy="0"/>
+          <a:chOff x="0" y="0"/>
+          <a:chExt cx="0" cy="0"/>
+        </a:xfrm>
+      </p:grpSpPr>
+      <p:sp>
+        <p:nvSpPr>
+          <p:cNvPr id="2" name="Slide Image Placeholder 1"/>
+          <p:cNvSpPr>
+            <a:spLocks noGrp="1"/>
+          </p:cNvSpPr>
+          <p:nvPr>
+            <p:ph type="sldImg" idx="2"/>
+          </p:nvPr>
+        </p:nvSpPr>
+        <p:spPr/>
+      </p:sp>
+      <p:sp>
+        <p:nvSpPr>
+          <p:cNvPr id="3" name="Notes Placeholder 2"/>
+          <p:cNvSpPr>
+            <a:spLocks noGrp="1"/>
+          </p:cNvSpPr>
+          <p:nvPr>
+            <p:ph type="body" idx="3" sz="quarter"/>
+          </p:nvPr>
+        </p:nvSpPr>
+        <p:spPr/>
+        <p:txBody>
+          <a:bodyPr/>
+          <a:lstStyle/>
+          <a:p>
+            <a:r>
+              <a:t>这是项目的全景时间线。</a:t>
+            </a:r>
+          </a:p>
+          <a:p>
+            <a:r>
+              <a:t>第一周做架构设计，我是总架构师；第二到三周攻核心引擎，七十七条审核规则，我是规则设计者；第四周前端改版，十九个页面，我是产品设计师；第五周功能增强，我是需求定义者；第六周接入Oracle迁移规则四十二条，我是规范制定者；第七周质检验收，八百八十个用例回归零失败，我是质量把关者；第八周上线准备，一键部署包定版，我回归老本行，运维专家。</a:t>
+            </a:r>
+          </a:p>
+          <a:p>
+            <a:r>
+              <a:t>大家注意，每个阶段我扮演不同的专家角色，而AI团队三线并行——这就是一个人的"多线程"工作方式。</a:t>
+            </a:r>
+          </a:p>
+        </p:txBody>
+      </p:sp>
+      <p:sp>
+        <p:nvSpPr>
+          <p:cNvPr id="4" name="Slide Number Placeholder 3"/>
+          <p:cNvSpPr>
+            <a:spLocks noGrp="1"/>
+          </p:cNvSpPr>
+          <p:nvPr>
+            <p:ph type="sldNum" idx="5" sz="quarter"/>
+          </p:nvPr>
+        </p:nvSpPr>
+        <p:spPr/>
+      </p:sp>
+    </p:spTree>
+  </p:cSld>
+  <p:clrMapOvr>
+    <a:masterClrMapping/>
+  </p:clrMapOvr>
+</p:notes>
+</file>
+
+<file path=ppt/notesSlides/notesSlide14.xml><?xml version="1.0" encoding="utf-8"?>
+<p:notes xmlns:a="http://schemas.openxmlformats.org/drawingml/2006/main" xmlns:p="http://schemas.openxmlformats.org/presentationml/2006/main" xmlns:r="http://schemas.openxmlformats.org/officeDocument/2006/relationships">
+  <p:cSld>
+    <p:spTree>
+      <p:nvGrpSpPr>
+        <p:cNvPr id="1" name=""/>
+        <p:cNvGrpSpPr/>
+        <p:nvPr/>
+      </p:nvGrpSpPr>
+      <p:grpSpPr>
+        <a:xfrm>
+          <a:off x="0" y="0"/>
+          <a:ext cx="0" cy="0"/>
+          <a:chOff x="0" y="0"/>
+          <a:chExt cx="0" cy="0"/>
+        </a:xfrm>
+      </p:grpSpPr>
+      <p:sp>
+        <p:nvSpPr>
+          <p:cNvPr id="2" name="Slide Image Placeholder 1"/>
+          <p:cNvSpPr>
+            <a:spLocks noGrp="1"/>
+          </p:cNvSpPr>
+          <p:nvPr>
+            <p:ph type="sldImg" idx="2"/>
+          </p:nvPr>
+        </p:nvSpPr>
+        <p:spPr/>
+      </p:sp>
+      <p:sp>
+        <p:nvSpPr>
+          <p:cNvPr id="3" name="Notes Placeholder 2"/>
+          <p:cNvSpPr>
+            <a:spLocks noGrp="1"/>
+          </p:cNvSpPr>
+          <p:nvPr>
+            <p:ph type="body" idx="3" sz="quarter"/>
+          </p:nvPr>
+        </p:nvSpPr>
+        <p:spPr/>
+        <p:txBody>
+          <a:bodyPr/>
+          <a:lstStyle/>
+          <a:p>
+            <a:r>
+              <a:t>这一页的数据全部来自Git代码仓库的真实统计，每一个数字都可以查证。</a:t>
+            </a:r>
+          </a:p>
+          <a:p>
+            <a:r>
+              <a:t>六十二次代码提交，全部由AI编写；两万九千八百行工程代码，其中后端一万六千五百行、测试一万一千八百行；二十六份项目文档，一万两千五百行，设计、测试、部署、运维全套齐备；八百八十项自动化测试，上线前全量回归零失败。</a:t>
+            </a:r>
+          </a:p>
+          <a:p>
+            <a:r>
+              <a:t>而最下面这行金色的字，是我最想让大家记住的：我本人手写代码，零行。我贡献的，是设计思想、规则体系，和每一轮的质量裁决。</a:t>
+            </a:r>
+          </a:p>
+        </p:txBody>
+      </p:sp>
+      <p:sp>
+        <p:nvSpPr>
+          <p:cNvPr id="4" name="Slide Number Placeholder 3"/>
+          <p:cNvSpPr>
+            <a:spLocks noGrp="1"/>
+          </p:cNvSpPr>
+          <p:nvPr>
+            <p:ph type="sldNum" idx="5" sz="quarter"/>
+          </p:nvPr>
+        </p:nvSpPr>
+        <p:spPr/>
+      </p:sp>
+    </p:spTree>
+  </p:cSld>
+  <p:clrMapOvr>
+    <a:masterClrMapping/>
+  </p:clrMapOvr>
+</p:notes>
+</file>
+
+<file path=ppt/notesSlides/notesSlide15.xml><?xml version="1.0" encoding="utf-8"?>
+<p:notes xmlns:a="http://schemas.openxmlformats.org/drawingml/2006/main" xmlns:p="http://schemas.openxmlformats.org/presentationml/2006/main" xmlns:r="http://schemas.openxmlformats.org/officeDocument/2006/relationships">
+  <p:cSld>
+    <p:spTree>
+      <p:nvGrpSpPr>
+        <p:cNvPr id="1" name=""/>
+        <p:cNvGrpSpPr/>
+        <p:nvPr/>
+      </p:nvGrpSpPr>
+      <p:grpSpPr>
+        <a:xfrm>
+          <a:off x="0" y="0"/>
+          <a:ext cx="0" cy="0"/>
+          <a:chOff x="0" y="0"/>
+          <a:chExt cx="0" cy="0"/>
+        </a:xfrm>
+      </p:grpSpPr>
+      <p:sp>
+        <p:nvSpPr>
+          <p:cNvPr id="2" name="Slide Image Placeholder 1"/>
+          <p:cNvSpPr>
+            <a:spLocks noGrp="1"/>
+          </p:cNvSpPr>
+          <p:nvPr>
+            <p:ph type="sldImg" idx="2"/>
+          </p:nvPr>
+        </p:nvSpPr>
+        <p:spPr/>
+      </p:sp>
+      <p:sp>
+        <p:nvSpPr>
+          <p:cNvPr id="3" name="Notes Placeholder 2"/>
+          <p:cNvSpPr>
+            <a:spLocks noGrp="1"/>
+          </p:cNvSpPr>
+          <p:nvPr>
+            <p:ph type="body" idx="3" sz="quarter"/>
+          </p:nvPr>
+        </p:nvSpPr>
+        <p:spPr/>
+        <p:txBody>
+          <a:bodyPr/>
+          <a:lstStyle/>
+          <a:p>
+            <a:r>
+              <a:t>接下来用两个典型案例，展开讲讲这套方法是怎么运转的。第一个案例，Oracle迁移规则的诞生——这是整个项目里最能体现专家价值的一战。</a:t>
+            </a:r>
+          </a:p>
+          <a:p>
+            <a:r>
+              <a:t>背景是这样的：原厂给了一份《Oracle迁移TDSQL改造适配方案》，七百二十九行的Word文档，里面全是干货：to_char、nvl、decode这些函数不支持怎么改写，rownum、MERGE INTO、WITH AS这些语法不兼容怎么替换，还有分布式场景下的各种限制、分片键的六条军规。</a:t>
+            </a:r>
+          </a:p>
+          <a:p>
+            <a:r>
+              <a:t>如果靠人工逐条记忆、逐条排查——右边这个红色卡片说得很清楚——一个DBA团队也得干几个月，还必然有遗漏。我的目标只有一个：把这份文档的每一个规范点，无遗漏地变成审核工具里可执行的规则。</a:t>
+            </a:r>
+          </a:p>
+        </p:txBody>
+      </p:sp>
+      <p:sp>
+        <p:nvSpPr>
+          <p:cNvPr id="4" name="Slide Number Placeholder 3"/>
+          <p:cNvSpPr>
+            <a:spLocks noGrp="1"/>
+          </p:cNvSpPr>
+          <p:nvPr>
+            <p:ph type="sldNum" idx="5" sz="quarter"/>
+          </p:nvPr>
+        </p:nvSpPr>
+        <p:spPr/>
+      </p:sp>
+    </p:spTree>
+  </p:cSld>
+  <p:clrMapOvr>
+    <a:masterClrMapping/>
+  </p:clrMapOvr>
+</p:notes>
+</file>
+
+<file path=ppt/notesSlides/notesSlide16.xml><?xml version="1.0" encoding="utf-8"?>
+<p:notes xmlns:a="http://schemas.openxmlformats.org/drawingml/2006/main" xmlns:p="http://schemas.openxmlformats.org/presentationml/2006/main" xmlns:r="http://schemas.openxmlformats.org/officeDocument/2006/relationships">
+  <p:cSld>
+    <p:spTree>
+      <p:nvGrpSpPr>
+        <p:cNvPr id="1" name=""/>
+        <p:cNvGrpSpPr/>
+        <p:nvPr/>
+      </p:nvGrpSpPr>
+      <p:grpSpPr>
+        <a:xfrm>
+          <a:off x="0" y="0"/>
+          <a:ext cx="0" cy="0"/>
+          <a:chOff x="0" y="0"/>
+          <a:chExt cx="0" cy="0"/>
+        </a:xfrm>
+      </p:grpSpPr>
+      <p:sp>
+        <p:nvSpPr>
+          <p:cNvPr id="2" name="Slide Image Placeholder 1"/>
+          <p:cNvSpPr>
+            <a:spLocks noGrp="1"/>
+          </p:cNvSpPr>
+          <p:nvPr>
+            <p:ph type="sldImg" idx="2"/>
+          </p:nvPr>
+        </p:nvSpPr>
+        <p:spPr/>
+      </p:sp>
+      <p:sp>
+        <p:nvSpPr>
+          <p:cNvPr id="3" name="Notes Placeholder 2"/>
+          <p:cNvSpPr>
+            <a:spLocks noGrp="1"/>
+          </p:cNvSpPr>
+          <p:nvPr>
+            <p:ph type="body" idx="3" sz="quarter"/>
+          </p:nvPr>
+        </p:nvSpPr>
+        <p:spPr/>
+        <p:txBody>
+          <a:bodyPr/>
+          <a:lstStyle/>
+          <a:p>
+            <a:r>
+              <a:t>六步走完这件事。</a:t>
+            </a:r>
+          </a:p>
+          <a:p>
+            <a:r>
+              <a:t>第一步，我把七百二十九行文档交给设计智能体，指令的关键词是"无遗漏"；第二步，设计智能体产出了六百四十八行的设计说明书，五十二个规范点的追溯矩阵、四十二条新规则的逐条规格；第三步，我把说明书交给编码智能体，要求"严格按每一个规格编码"；第四步，AI写出了近千行的规则代码；第五步，测试和质检独立揭短，真挖出了三个缺陷；第六步，我逐条确认根因、指挥修复，最终一百八十四项验收全过、八百八十项回归零失败，准出。</a:t>
+            </a:r>
+          </a:p>
+          <a:p>
+            <a:r>
+              <a:t>请注意关键洞察：如果我不懂TDSQL的技术细节、不懂原厂文档的每一个规范点，AI是不可能自动完成这些工作的。是我的专家判断力，确保了规则的完整和准确。</a:t>
+            </a:r>
+          </a:p>
+        </p:txBody>
+      </p:sp>
+      <p:sp>
+        <p:nvSpPr>
+          <p:cNvPr id="4" name="Slide Number Placeholder 3"/>
+          <p:cNvSpPr>
+            <a:spLocks noGrp="1"/>
+          </p:cNvSpPr>
+          <p:nvPr>
+            <p:ph type="sldNum" idx="5" sz="quarter"/>
+          </p:nvPr>
+        </p:nvSpPr>
+        <p:spPr/>
+      </p:sp>
+    </p:spTree>
+  </p:cSld>
+  <p:clrMapOvr>
+    <a:masterClrMapping/>
+  </p:clrMapOvr>
+</p:notes>
+</file>
+
+<file path=ppt/notesSlides/notesSlide17.xml><?xml version="1.0" encoding="utf-8"?>
+<p:notes xmlns:a="http://schemas.openxmlformats.org/drawingml/2006/main" xmlns:p="http://schemas.openxmlformats.org/presentationml/2006/main" xmlns:r="http://schemas.openxmlformats.org/officeDocument/2006/relationships">
+  <p:cSld>
+    <p:spTree>
+      <p:nvGrpSpPr>
+        <p:cNvPr id="1" name=""/>
+        <p:cNvGrpSpPr/>
+        <p:nvPr/>
+      </p:nvGrpSpPr>
+      <p:grpSpPr>
+        <a:xfrm>
+          <a:off x="0" y="0"/>
+          <a:ext cx="0" cy="0"/>
+          <a:chOff x="0" y="0"/>
+          <a:chExt cx="0" cy="0"/>
+        </a:xfrm>
+      </p:grpSpPr>
+      <p:sp>
+        <p:nvSpPr>
+          <p:cNvPr id="2" name="Slide Image Placeholder 1"/>
+          <p:cNvSpPr>
+            <a:spLocks noGrp="1"/>
+          </p:cNvSpPr>
+          <p:nvPr>
+            <p:ph type="sldImg" idx="2"/>
+          </p:nvPr>
+        </p:nvSpPr>
+        <p:spPr/>
+      </p:sp>
+      <p:sp>
+        <p:nvSpPr>
+          <p:cNvPr id="3" name="Notes Placeholder 2"/>
+          <p:cNvSpPr>
+            <a:spLocks noGrp="1"/>
+          </p:cNvSpPr>
+          <p:nvPr>
+            <p:ph type="body" idx="3" sz="quarter"/>
+          </p:nvPr>
+        </p:nvSpPr>
+        <p:spPr/>
+        <p:txBody>
+          <a:bodyPr/>
+          <a:lstStyle/>
+          <a:p>
+            <a:r>
+              <a:t>这个案例的成果：新增四十二条审核规则；原厂五十二个规范点百分之百无遗漏覆盖；一百八十四项验收检查全部通过；而全流程耗时——大约一周，传统方式需要几个月。</a:t>
+            </a:r>
+          </a:p>
+          <a:p>
+            <a:r>
+              <a:t>更重要的是下面这段话：上线以后，每一次SQL审核，这四十二条规则都在自动工作。开发再提交to_char、nvl、rownum这些Oracle写法，审核工具当场拦截，并且给出原厂文档对应的TDSQL改写方案。</a:t>
+            </a:r>
+          </a:p>
+          <a:p>
+            <a:r>
+              <a:t>原厂规范，从纸面文档，变成了每一次提交都在执行的自动化防线。</a:t>
+            </a:r>
+          </a:p>
+        </p:txBody>
+      </p:sp>
+      <p:sp>
+        <p:nvSpPr>
+          <p:cNvPr id="4" name="Slide Number Placeholder 3"/>
+          <p:cNvSpPr>
+            <a:spLocks noGrp="1"/>
+          </p:cNvSpPr>
+          <p:nvPr>
+            <p:ph type="sldNum" idx="5" sz="quarter"/>
+          </p:nvPr>
+        </p:nvSpPr>
+        <p:spPr/>
+      </p:sp>
+    </p:spTree>
+  </p:cSld>
+  <p:clrMapOvr>
+    <a:masterClrMapping/>
+  </p:clrMapOvr>
+</p:notes>
+</file>
+
+<file path=ppt/notesSlides/notesSlide18.xml><?xml version="1.0" encoding="utf-8"?>
+<p:notes xmlns:a="http://schemas.openxmlformats.org/drawingml/2006/main" xmlns:p="http://schemas.openxmlformats.org/presentationml/2006/main" xmlns:r="http://schemas.openxmlformats.org/officeDocument/2006/relationships">
+  <p:cSld>
+    <p:spTree>
+      <p:nvGrpSpPr>
+        <p:cNvPr id="1" name=""/>
+        <p:cNvGrpSpPr/>
+        <p:nvPr/>
+      </p:nvGrpSpPr>
+      <p:grpSpPr>
+        <a:xfrm>
+          <a:off x="0" y="0"/>
+          <a:ext cx="0" cy="0"/>
+          <a:chOff x="0" y="0"/>
+          <a:chExt cx="0" cy="0"/>
+        </a:xfrm>
+      </p:grpSpPr>
+      <p:sp>
+        <p:nvSpPr>
+          <p:cNvPr id="2" name="Slide Image Placeholder 1"/>
+          <p:cNvSpPr>
+            <a:spLocks noGrp="1"/>
+          </p:cNvSpPr>
+          <p:nvPr>
+            <p:ph type="sldImg" idx="2"/>
+          </p:nvPr>
+        </p:nvSpPr>
+        <p:spPr/>
+      </p:sp>
+      <p:sp>
+        <p:nvSpPr>
+          <p:cNvPr id="3" name="Notes Placeholder 2"/>
+          <p:cNvSpPr>
+            <a:spLocks noGrp="1"/>
+          </p:cNvSpPr>
+          <p:nvPr>
+            <p:ph type="body" idx="3" sz="quarter"/>
+          </p:nvPr>
+        </p:nvSpPr>
+        <p:spPr/>
+        <p:txBody>
+          <a:bodyPr/>
+          <a:lstStyle/>
+          <a:p>
+            <a:r>
+              <a:t>第二个案例，讲质检验收的闭环，让大家看看AI给AI挑刺是什么样子。</a:t>
+            </a:r>
+          </a:p>
+          <a:p>
+            <a:r>
+              <a:t>左边是质检智能体验收结论的原文，它先肯定"引擎是几轮交付里质量最高的"，但话锋一转——"仍不能准出"，因为一条军规是死代码、一个高频误报、测试工作没做。够狠吧？这就是我要的独立质检。</a:t>
+            </a:r>
+          </a:p>
+          <a:p>
+            <a:r>
+              <a:t>右边是我的处理：逐条审核四个缺陷、确认根因分析是准的，然后按优先级下达整改指令，并且定死复验口径。下面四个绿色卡片是整改结果，最终复验：八百八十项测试通过、零失败，准出上线。</a:t>
+            </a:r>
+          </a:p>
+          <a:p>
+            <a:r>
+              <a:t>还是那句话：编码智能体说"写对了"不算数，必须过独立验证，再由我做最终裁决。</a:t>
+            </a:r>
+          </a:p>
+        </p:txBody>
+      </p:sp>
+      <p:sp>
+        <p:nvSpPr>
+          <p:cNvPr id="4" name="Slide Number Placeholder 3"/>
+          <p:cNvSpPr>
+            <a:spLocks noGrp="1"/>
+          </p:cNvSpPr>
+          <p:nvPr>
+            <p:ph type="sldNum" idx="5" sz="quarter"/>
+          </p:nvPr>
+        </p:nvSpPr>
+        <p:spPr/>
+      </p:sp>
+    </p:spTree>
+  </p:cSld>
+  <p:clrMapOvr>
+    <a:masterClrMapping/>
+  </p:clrMapOvr>
+</p:notes>
+</file>
+
+<file path=ppt/notesSlides/notesSlide19.xml><?xml version="1.0" encoding="utf-8"?>
+<p:notes xmlns:a="http://schemas.openxmlformats.org/drawingml/2006/main" xmlns:p="http://schemas.openxmlformats.org/presentationml/2006/main" xmlns:r="http://schemas.openxmlformats.org/officeDocument/2006/relationships">
+  <p:cSld>
+    <p:spTree>
+      <p:nvGrpSpPr>
+        <p:cNvPr id="1" name=""/>
+        <p:cNvGrpSpPr/>
+        <p:nvPr/>
+      </p:nvGrpSpPr>
+      <p:grpSpPr>
+        <a:xfrm>
+          <a:off x="0" y="0"/>
+          <a:ext cx="0" cy="0"/>
+          <a:chOff x="0" y="0"/>
+          <a:chExt cx="0" cy="0"/>
+        </a:xfrm>
+      </p:grpSpPr>
+      <p:sp>
+        <p:nvSpPr>
+          <p:cNvPr id="2" name="Slide Image Placeholder 1"/>
+          <p:cNvSpPr>
+            <a:spLocks noGrp="1"/>
+          </p:cNvSpPr>
+          <p:nvPr>
+            <p:ph type="sldImg" idx="2"/>
+          </p:nvPr>
+        </p:nvSpPr>
+        <p:spPr/>
+      </p:sp>
+      <p:sp>
+        <p:nvSpPr>
+          <p:cNvPr id="3" name="Notes Placeholder 2"/>
+          <p:cNvSpPr>
+            <a:spLocks noGrp="1"/>
+          </p:cNvSpPr>
+          <p:nvPr>
+            <p:ph type="body" idx="3" sz="quarter"/>
+          </p:nvPr>
+        </p:nvSpPr>
+        <p:spPr/>
+        <p:txBody>
+          <a:bodyPr/>
+          <a:lstStyle/>
+          <a:p>
+            <a:r>
+              <a:t>领导要求我重点讲讲交互过程，这一页就是"无数次交互"的真实样貌——前端改版的四轮攻坚，我一点都不回避。</a:t>
+            </a:r>
+          </a:p>
+          <a:p>
+            <a:r>
+              <a:t>第一轮，验收发现十九个页面里十一个是空壳，我发出整改单，逐页列问题；第二轮，页面填上了但表格全是空的，质检定位到根因是数据解包的问题，我要求出"傻瓜式"整改文档，错误代码和正确代码逐行对照；第三轮，只剩两个接口参数错误，我直接给出照抄级的修复代码，并且要求"亲手点一遍再交付"；第四轮，全部验证通过。</a:t>
+            </a:r>
+          </a:p>
+          <a:p>
+            <a:r>
+              <a:t>我想说的是：四轮不是失败，恰恰是方法论在工作——每一轮都可度量、可收敛。整个项目，这样的"验收、整改、复验"循环发生了十几次。交互越充分，AI的输出就越接近专家标准。</a:t>
+            </a:r>
+          </a:p>
+        </p:txBody>
+      </p:sp>
+      <p:sp>
+        <p:nvSpPr>
+          <p:cNvPr id="4" name="Slide Number Placeholder 3"/>
+          <p:cNvSpPr>
+            <a:spLocks noGrp="1"/>
+          </p:cNvSpPr>
+          <p:nvPr>
+            <p:ph type="sldNum" idx="5" sz="quarter"/>
+          </p:nvPr>
+        </p:nvSpPr>
+        <p:spPr/>
+      </p:sp>
+    </p:spTree>
+  </p:cSld>
+  <p:clrMapOvr>
+    <a:masterClrMapping/>
+  </p:clrMapOvr>
+</p:notes>
+</file>
+
+<file path=ppt/notesSlides/notesSlide2.xml><?xml version="1.0" encoding="utf-8"?>
+<p:notes xmlns:a="http://schemas.openxmlformats.org/drawingml/2006/main" xmlns:p="http://schemas.openxmlformats.org/presentationml/2006/main" xmlns:r="http://schemas.openxmlformats.org/officeDocument/2006/relationships">
+  <p:cSld>
+    <p:spTree>
+      <p:nvGrpSpPr>
+        <p:cNvPr id="1" name=""/>
+        <p:cNvGrpSpPr/>
+        <p:nvPr/>
+      </p:nvGrpSpPr>
+      <p:grpSpPr>
+        <a:xfrm>
+          <a:off x="0" y="0"/>
+          <a:ext cx="0" cy="0"/>
+          <a:chOff x="0" y="0"/>
+          <a:chExt cx="0" cy="0"/>
+        </a:xfrm>
+      </p:grpSpPr>
+      <p:sp>
+        <p:nvSpPr>
+          <p:cNvPr id="2" name="Slide Image Placeholder 1"/>
+          <p:cNvSpPr>
+            <a:spLocks noGrp="1"/>
+          </p:cNvSpPr>
+          <p:nvPr>
+            <p:ph type="sldImg" idx="2"/>
+          </p:nvPr>
+        </p:nvSpPr>
+        <p:spPr/>
+      </p:sp>
+      <p:sp>
+        <p:nvSpPr>
+          <p:cNvPr id="3" name="Notes Placeholder 2"/>
+          <p:cNvSpPr>
+            <a:spLocks noGrp="1"/>
+          </p:cNvSpPr>
+          <p:nvPr>
+            <p:ph type="body" idx="3" sz="quarter"/>
+          </p:nvPr>
+        </p:nvSpPr>
+        <p:spPr/>
+        <p:txBody>
+          <a:bodyPr/>
+          <a:lstStyle/>
+          <a:p>
+            <a:r>
+              <a:t>今天的汇报分六个部分。</a:t>
+            </a:r>
+          </a:p>
+          <a:p>
+            <a:r>
+              <a:t>第一部分讲背景，为什么最懂需求的人反而做不出工具；第二部分是方法论，也是今天的核心——专家驱动的三角色AI协作模型；第三部分实战历程，八周里到底发生了什么；第四部分提示词工程，怎么让AI完全听懂人话；第五部分用数据说话，效率提升三到六倍，成本节省五十万以上；最后第六部分，谈谈这件事对个人能力的提升，以及在咱们部门推广的建议。</a:t>
+            </a:r>
+          </a:p>
+        </p:txBody>
+      </p:sp>
+      <p:sp>
+        <p:nvSpPr>
+          <p:cNvPr id="4" name="Slide Number Placeholder 3"/>
+          <p:cNvSpPr>
+            <a:spLocks noGrp="1"/>
+          </p:cNvSpPr>
+          <p:nvPr>
+            <p:ph type="sldNum" idx="5" sz="quarter"/>
+          </p:nvPr>
+        </p:nvSpPr>
+        <p:spPr/>
+      </p:sp>
+    </p:spTree>
+  </p:cSld>
+  <p:clrMapOvr>
+    <a:masterClrMapping/>
+  </p:clrMapOvr>
+</p:notes>
+</file>
+
+<file path=ppt/notesSlides/notesSlide20.xml><?xml version="1.0" encoding="utf-8"?>
+<p:notes xmlns:a="http://schemas.openxmlformats.org/drawingml/2006/main" xmlns:p="http://schemas.openxmlformats.org/presentationml/2006/main" xmlns:r="http://schemas.openxmlformats.org/officeDocument/2006/relationships">
+  <p:cSld>
+    <p:spTree>
+      <p:nvGrpSpPr>
+        <p:cNvPr id="1" name=""/>
+        <p:cNvGrpSpPr/>
+        <p:nvPr/>
+      </p:nvGrpSpPr>
+      <p:grpSpPr>
+        <a:xfrm>
+          <a:off x="0" y="0"/>
+          <a:ext cx="0" cy="0"/>
+          <a:chOff x="0" y="0"/>
+          <a:chExt cx="0" cy="0"/>
+        </a:xfrm>
+      </p:grpSpPr>
+      <p:sp>
+        <p:nvSpPr>
+          <p:cNvPr id="2" name="Slide Image Placeholder 1"/>
+          <p:cNvSpPr>
+            <a:spLocks noGrp="1"/>
+          </p:cNvSpPr>
+          <p:nvPr>
+            <p:ph type="sldImg" idx="2"/>
+          </p:nvPr>
+        </p:nvSpPr>
+        <p:spPr/>
+      </p:sp>
+      <p:sp>
+        <p:nvSpPr>
+          <p:cNvPr id="3" name="Notes Placeholder 2"/>
+          <p:cNvSpPr>
+            <a:spLocks noGrp="1"/>
+          </p:cNvSpPr>
+          <p:nvPr>
+            <p:ph type="body" idx="3" sz="quarter"/>
+          </p:nvPr>
+        </p:nvSpPr>
+        <p:spPr/>
+        <p:txBody>
+          <a:bodyPr/>
+          <a:lstStyle/>
+          <a:p>
+            <a:r>
+              <a:t>第四部分，提示词工程。怎么跟AI说话，它才能完全听懂你的意图？我总结了六条铁律和四个真实的提示词实录。</a:t>
+            </a:r>
+          </a:p>
+        </p:txBody>
+      </p:sp>
+      <p:sp>
+        <p:nvSpPr>
+          <p:cNvPr id="4" name="Slide Number Placeholder 3"/>
+          <p:cNvSpPr>
+            <a:spLocks noGrp="1"/>
+          </p:cNvSpPr>
+          <p:nvPr>
+            <p:ph type="sldNum" idx="5" sz="quarter"/>
+          </p:nvPr>
+        </p:nvSpPr>
+        <p:spPr/>
+      </p:sp>
+    </p:spTree>
+  </p:cSld>
+  <p:clrMapOvr>
+    <a:masterClrMapping/>
+  </p:clrMapOvr>
+</p:notes>
+</file>
+
+<file path=ppt/notesSlides/notesSlide21.xml><?xml version="1.0" encoding="utf-8"?>
+<p:notes xmlns:a="http://schemas.openxmlformats.org/drawingml/2006/main" xmlns:p="http://schemas.openxmlformats.org/presentationml/2006/main" xmlns:r="http://schemas.openxmlformats.org/officeDocument/2006/relationships">
+  <p:cSld>
+    <p:spTree>
+      <p:nvGrpSpPr>
+        <p:cNvPr id="1" name=""/>
+        <p:cNvGrpSpPr/>
+        <p:nvPr/>
+      </p:nvGrpSpPr>
+      <p:grpSpPr>
+        <a:xfrm>
+          <a:off x="0" y="0"/>
+          <a:ext cx="0" cy="0"/>
+          <a:chOff x="0" y="0"/>
+          <a:chExt cx="0" cy="0"/>
+        </a:xfrm>
+      </p:grpSpPr>
+      <p:sp>
+        <p:nvSpPr>
+          <p:cNvPr id="2" name="Slide Image Placeholder 1"/>
+          <p:cNvSpPr>
+            <a:spLocks noGrp="1"/>
+          </p:cNvSpPr>
+          <p:nvPr>
+            <p:ph type="sldImg" idx="2"/>
+          </p:nvPr>
+        </p:nvSpPr>
+        <p:spPr/>
+      </p:sp>
+      <p:sp>
+        <p:nvSpPr>
+          <p:cNvPr id="3" name="Notes Placeholder 2"/>
+          <p:cNvSpPr>
+            <a:spLocks noGrp="1"/>
+          </p:cNvSpPr>
+          <p:nvPr>
+            <p:ph type="body" idx="3" sz="quarter"/>
+          </p:nvPr>
+        </p:nvSpPr>
+        <p:spPr/>
+        <p:txBody>
+          <a:bodyPr/>
+          <a:lstStyle/>
+          <a:p>
+            <a:r>
+              <a:t>先看六条铁律。</a:t>
+            </a:r>
+          </a:p>
+          <a:p>
+            <a:r>
+              <a:t>一，专家先行：先想清楚再让AI做，别让AI替你做决策，"帮我设计个系统"这种话太模糊；二，设计先行：先出设计说明书再编码，直接写代码必然方向跑偏；三，精确约束：给明确的验收标准；四，闭环验证：每轮交付必须过独立测试；五，迭代改进：接受AI不完美，持续推动收敛；六，角色分工：设计编码测试不混岗，否则没有制衡。</a:t>
+            </a:r>
+          </a:p>
+          <a:p>
+            <a:r>
+              <a:t>一句话总结：把AI当成能力极强、但需要明确指令的新员工——你给的目标越清晰、验收越严格，它的产出就越接近专家水准。</a:t>
+            </a:r>
+          </a:p>
+        </p:txBody>
+      </p:sp>
+      <p:sp>
+        <p:nvSpPr>
+          <p:cNvPr id="4" name="Slide Number Placeholder 3"/>
+          <p:cNvSpPr>
+            <a:spLocks noGrp="1"/>
+          </p:cNvSpPr>
+          <p:nvPr>
+            <p:ph type="sldNum" idx="5" sz="quarter"/>
+          </p:nvPr>
+        </p:nvSpPr>
+        <p:spPr/>
+      </p:sp>
+    </p:spTree>
+  </p:cSld>
+  <p:clrMapOvr>
+    <a:masterClrMapping/>
+  </p:clrMapOvr>
+</p:notes>
+</file>
+
+<file path=ppt/notesSlides/notesSlide22.xml><?xml version="1.0" encoding="utf-8"?>
+<p:notes xmlns:a="http://schemas.openxmlformats.org/drawingml/2006/main" xmlns:p="http://schemas.openxmlformats.org/presentationml/2006/main" xmlns:r="http://schemas.openxmlformats.org/officeDocument/2006/relationships">
+  <p:cSld>
+    <p:spTree>
+      <p:nvGrpSpPr>
+        <p:cNvPr id="1" name=""/>
+        <p:cNvGrpSpPr/>
+        <p:nvPr/>
+      </p:nvGrpSpPr>
+      <p:grpSpPr>
+        <a:xfrm>
+          <a:off x="0" y="0"/>
+          <a:ext cx="0" cy="0"/>
+          <a:chOff x="0" y="0"/>
+          <a:chExt cx="0" cy="0"/>
+        </a:xfrm>
+      </p:grpSpPr>
+      <p:sp>
+        <p:nvSpPr>
+          <p:cNvPr id="2" name="Slide Image Placeholder 1"/>
+          <p:cNvSpPr>
+            <a:spLocks noGrp="1"/>
+          </p:cNvSpPr>
+          <p:nvPr>
+            <p:ph type="sldImg" idx="2"/>
+          </p:nvPr>
+        </p:nvSpPr>
+        <p:spPr/>
+      </p:sp>
+      <p:sp>
+        <p:nvSpPr>
+          <p:cNvPr id="3" name="Notes Placeholder 2"/>
+          <p:cNvSpPr>
+            <a:spLocks noGrp="1"/>
+          </p:cNvSpPr>
+          <p:nvPr>
+            <p:ph type="body" idx="3" sz="quarter"/>
+          </p:nvPr>
+        </p:nvSpPr>
+        <p:spPr/>
+        <p:txBody>
+          <a:bodyPr/>
+          <a:lstStyle/>
+          <a:p>
+            <a:r>
+              <a:t>这两页是我真实使用过的提示词原文，一个字没改。</a:t>
+            </a:r>
+          </a:p>
+          <a:p>
+            <a:r>
+              <a:t>左边是任务委派："你从GitHub更新最新内容，把设计说明书严格按要求编码开发，说明书在哪个目录你自己取。完成后自己先做冒烟测试，通过后向我汇报，我会让测试智能体做SIT和UAT。"要点是三个明确：明确输入、明确流程、明确后续。</a:t>
+            </a:r>
+          </a:p>
+          <a:p>
+            <a:r>
+              <a:t>右边是缺陷修复，就两句话："这是测试报告，你照着修复。改好后我让测试智能体复测。"要点是不过度指导，让AI自己分析问题，同时"复测"两个字形成压力闭环。</a:t>
+            </a:r>
+          </a:p>
+          <a:p>
+            <a:r>
+              <a:t>大家看，没有任何编程术语，全是大白话。</a:t>
+            </a:r>
+          </a:p>
+        </p:txBody>
+      </p:sp>
+      <p:sp>
+        <p:nvSpPr>
+          <p:cNvPr id="4" name="Slide Number Placeholder 3"/>
+          <p:cNvSpPr>
+            <a:spLocks noGrp="1"/>
+          </p:cNvSpPr>
+          <p:nvPr>
+            <p:ph type="sldNum" idx="5" sz="quarter"/>
+          </p:nvPr>
+        </p:nvSpPr>
+        <p:spPr/>
+      </p:sp>
+    </p:spTree>
+  </p:cSld>
+  <p:clrMapOvr>
+    <a:masterClrMapping/>
+  </p:clrMapOvr>
+</p:notes>
+</file>
+
+<file path=ppt/notesSlides/notesSlide23.xml><?xml version="1.0" encoding="utf-8"?>
+<p:notes xmlns:a="http://schemas.openxmlformats.org/drawingml/2006/main" xmlns:p="http://schemas.openxmlformats.org/presentationml/2006/main" xmlns:r="http://schemas.openxmlformats.org/officeDocument/2006/relationships">
+  <p:cSld>
+    <p:spTree>
+      <p:nvGrpSpPr>
+        <p:cNvPr id="1" name=""/>
+        <p:cNvGrpSpPr/>
+        <p:nvPr/>
+      </p:nvGrpSpPr>
+      <p:grpSpPr>
+        <a:xfrm>
+          <a:off x="0" y="0"/>
+          <a:ext cx="0" cy="0"/>
+          <a:chOff x="0" y="0"/>
+          <a:chExt cx="0" cy="0"/>
+        </a:xfrm>
+      </p:grpSpPr>
+      <p:sp>
+        <p:nvSpPr>
+          <p:cNvPr id="2" name="Slide Image Placeholder 1"/>
+          <p:cNvSpPr>
+            <a:spLocks noGrp="1"/>
+          </p:cNvSpPr>
+          <p:nvPr>
+            <p:ph type="sldImg" idx="2"/>
+          </p:nvPr>
+        </p:nvSpPr>
+        <p:spPr/>
+      </p:sp>
+      <p:sp>
+        <p:nvSpPr>
+          <p:cNvPr id="3" name="Notes Placeholder 2"/>
+          <p:cNvSpPr>
+            <a:spLocks noGrp="1"/>
+          </p:cNvSpPr>
+          <p:nvPr>
+            <p:ph type="body" idx="3" sz="quarter"/>
+          </p:nvPr>
+        </p:nvSpPr>
+        <p:spPr/>
+        <p:txBody>
+          <a:bodyPr/>
+          <a:lstStyle/>
+          <a:p>
+            <a:r>
+              <a:t>再看两个模式。</a:t>
+            </a:r>
+          </a:p>
+          <a:p>
+            <a:r>
+              <a:t>左边是质检驱动整改："我让设计智能体做了质检验收，结论是不予准出，质检意见在这个文档里，你拿下来照着改。"要点是引入独立质检角色，用质检报告驱动修复——报告写得越"傻瓜式"，修复就越精准。</a:t>
+            </a:r>
+          </a:p>
+          <a:p>
+            <a:r>
+              <a:t>右边是需求定义，就是Oracle规则那个案例的原始提示词："原厂今天给过来一份文档……这些内容对业务系统至关重要，现在急需把文档内容全部无遗漏地添加到审核规则库中。"要点是说清业务背景、紧迫程度和核心要求——"无遗漏"三个字，就是我给AI定的最高优先级。</a:t>
+            </a:r>
+          </a:p>
+        </p:txBody>
+      </p:sp>
+      <p:sp>
+        <p:nvSpPr>
+          <p:cNvPr id="4" name="Slide Number Placeholder 3"/>
+          <p:cNvSpPr>
+            <a:spLocks noGrp="1"/>
+          </p:cNvSpPr>
+          <p:nvPr>
+            <p:ph type="sldNum" idx="5" sz="quarter"/>
+          </p:nvPr>
+        </p:nvSpPr>
+        <p:spPr/>
+      </p:sp>
+    </p:spTree>
+  </p:cSld>
+  <p:clrMapOvr>
+    <a:masterClrMapping/>
+  </p:clrMapOvr>
+</p:notes>
+</file>
+
+<file path=ppt/notesSlides/notesSlide24.xml><?xml version="1.0" encoding="utf-8"?>
+<p:notes xmlns:a="http://schemas.openxmlformats.org/drawingml/2006/main" xmlns:p="http://schemas.openxmlformats.org/presentationml/2006/main" xmlns:r="http://schemas.openxmlformats.org/officeDocument/2006/relationships">
+  <p:cSld>
+    <p:spTree>
+      <p:nvGrpSpPr>
+        <p:cNvPr id="1" name=""/>
+        <p:cNvGrpSpPr/>
+        <p:nvPr/>
+      </p:nvGrpSpPr>
+      <p:grpSpPr>
+        <a:xfrm>
+          <a:off x="0" y="0"/>
+          <a:ext cx="0" cy="0"/>
+          <a:chOff x="0" y="0"/>
+          <a:chExt cx="0" cy="0"/>
+        </a:xfrm>
+      </p:grpSpPr>
+      <p:sp>
+        <p:nvSpPr>
+          <p:cNvPr id="2" name="Slide Image Placeholder 1"/>
+          <p:cNvSpPr>
+            <a:spLocks noGrp="1"/>
+          </p:cNvSpPr>
+          <p:nvPr>
+            <p:ph type="sldImg" idx="2"/>
+          </p:nvPr>
+        </p:nvSpPr>
+        <p:spPr/>
+      </p:sp>
+      <p:sp>
+        <p:nvSpPr>
+          <p:cNvPr id="3" name="Notes Placeholder 2"/>
+          <p:cNvSpPr>
+            <a:spLocks noGrp="1"/>
+          </p:cNvSpPr>
+          <p:nvPr>
+            <p:ph type="body" idx="3" sz="quarter"/>
+          </p:nvPr>
+        </p:nvSpPr>
+        <p:spPr/>
+        <p:txBody>
+          <a:bodyPr/>
+          <a:lstStyle/>
+          <a:p>
+            <a:r>
+              <a:t>当然，我也踩过坑，总结成五大陷阱送给大家。</a:t>
+            </a:r>
+          </a:p>
+          <a:p>
+            <a:r>
+              <a:t>一，让AI自己做架构决策，结果架构混乱前后矛盾——正确做法是专家定架构，AI做细节；二，一次提太多需求，AI理解偏差——要分阶段迭代；三，不看AI输出就继续下指令，错误会累积——每轮必须审核；四，忽略独立测试，上线才发现缺陷——测试先行；五，也是对咱们非编程背景同事最重要的一条：不用硬学编程术语，用业务语言描述需求就够了。我全程都是用DBA的话在指挥AI。</a:t>
+            </a:r>
+          </a:p>
+        </p:txBody>
+      </p:sp>
+      <p:sp>
+        <p:nvSpPr>
+          <p:cNvPr id="4" name="Slide Number Placeholder 3"/>
+          <p:cNvSpPr>
+            <a:spLocks noGrp="1"/>
+          </p:cNvSpPr>
+          <p:nvPr>
+            <p:ph type="sldNum" idx="5" sz="quarter"/>
+          </p:nvPr>
+        </p:nvSpPr>
+        <p:spPr/>
+      </p:sp>
+    </p:spTree>
+  </p:cSld>
+  <p:clrMapOvr>
+    <a:masterClrMapping/>
+  </p:clrMapOvr>
+</p:notes>
+</file>
+
+<file path=ppt/notesSlides/notesSlide25.xml><?xml version="1.0" encoding="utf-8"?>
+<p:notes xmlns:a="http://schemas.openxmlformats.org/drawingml/2006/main" xmlns:p="http://schemas.openxmlformats.org/presentationml/2006/main" xmlns:r="http://schemas.openxmlformats.org/officeDocument/2006/relationships">
+  <p:cSld>
+    <p:spTree>
+      <p:nvGrpSpPr>
+        <p:cNvPr id="1" name=""/>
+        <p:cNvGrpSpPr/>
+        <p:nvPr/>
+      </p:nvGrpSpPr>
+      <p:grpSpPr>
+        <a:xfrm>
+          <a:off x="0" y="0"/>
+          <a:ext cx="0" cy="0"/>
+          <a:chOff x="0" y="0"/>
+          <a:chExt cx="0" cy="0"/>
+        </a:xfrm>
+      </p:grpSpPr>
+      <p:sp>
+        <p:nvSpPr>
+          <p:cNvPr id="2" name="Slide Image Placeholder 1"/>
+          <p:cNvSpPr>
+            <a:spLocks noGrp="1"/>
+          </p:cNvSpPr>
+          <p:nvPr>
+            <p:ph type="sldImg" idx="2"/>
+          </p:nvPr>
+        </p:nvSpPr>
+        <p:spPr/>
+      </p:sp>
+      <p:sp>
+        <p:nvSpPr>
+          <p:cNvPr id="3" name="Notes Placeholder 2"/>
+          <p:cNvSpPr>
+            <a:spLocks noGrp="1"/>
+          </p:cNvSpPr>
+          <p:nvPr>
+            <p:ph type="body" idx="3" sz="quarter"/>
+          </p:nvPr>
+        </p:nvSpPr>
+        <p:spPr/>
+        <p:txBody>
+          <a:bodyPr/>
+          <a:lstStyle/>
+          <a:p>
+            <a:r>
+              <a:t>第五部分，成果与数据。前面讲了怎么干，现在用数字回答干得怎么样。</a:t>
+            </a:r>
+          </a:p>
+        </p:txBody>
+      </p:sp>
+      <p:sp>
+        <p:nvSpPr>
+          <p:cNvPr id="4" name="Slide Number Placeholder 3"/>
+          <p:cNvSpPr>
+            <a:spLocks noGrp="1"/>
+          </p:cNvSpPr>
+          <p:nvPr>
+            <p:ph type="sldNum" idx="5" sz="quarter"/>
+          </p:nvPr>
+        </p:nvSpPr>
+        <p:spPr/>
+      </p:sp>
+    </p:spTree>
+  </p:cSld>
+  <p:clrMapOvr>
+    <a:masterClrMapping/>
+  </p:clrMapOvr>
+</p:notes>
+</file>
+
+<file path=ppt/notesSlides/notesSlide26.xml><?xml version="1.0" encoding="utf-8"?>
+<p:notes xmlns:a="http://schemas.openxmlformats.org/drawingml/2006/main" xmlns:p="http://schemas.openxmlformats.org/presentationml/2006/main" xmlns:r="http://schemas.openxmlformats.org/officeDocument/2006/relationships">
+  <p:cSld>
+    <p:spTree>
+      <p:nvGrpSpPr>
+        <p:cNvPr id="1" name=""/>
+        <p:cNvGrpSpPr/>
+        <p:nvPr/>
+      </p:nvGrpSpPr>
+      <p:grpSpPr>
+        <a:xfrm>
+          <a:off x="0" y="0"/>
+          <a:ext cx="0" cy="0"/>
+          <a:chOff x="0" y="0"/>
+          <a:chExt cx="0" cy="0"/>
+        </a:xfrm>
+      </p:grpSpPr>
+      <p:sp>
+        <p:nvSpPr>
+          <p:cNvPr id="2" name="Slide Image Placeholder 1"/>
+          <p:cNvSpPr>
+            <a:spLocks noGrp="1"/>
+          </p:cNvSpPr>
+          <p:nvPr>
+            <p:ph type="sldImg" idx="2"/>
+          </p:nvPr>
+        </p:nvSpPr>
+        <p:spPr/>
+      </p:sp>
+      <p:sp>
+        <p:nvSpPr>
+          <p:cNvPr id="3" name="Notes Placeholder 2"/>
+          <p:cNvSpPr>
+            <a:spLocks noGrp="1"/>
+          </p:cNvSpPr>
+          <p:nvPr>
+            <p:ph type="body" idx="3" sz="quarter"/>
+          </p:nvPr>
+        </p:nvSpPr>
+        <p:spPr/>
+        <p:txBody>
+          <a:bodyPr/>
+          <a:lstStyle/>
+          <a:p>
+            <a:r>
+              <a:t>这就是交付成果：TDSQL数据库SQL审核工具v1.0.2。</a:t>
+            </a:r>
+          </a:p>
+          <a:p>
+            <a:r>
+              <a:t>上面十五个能力标签：SQL即时审核、文件批量审核、GitLab集成、慢SQL扫描分析、EXPLAIN诊断、数据库体检、大表治理、质量门禁、角色权限、监控告警、操作审计等等——是一个功能完整的企业级平台。</a:t>
+            </a:r>
+          </a:p>
+          <a:p>
+            <a:r>
+              <a:t>三个关键指标：规则，一百一十九条、九大分类；质量，八百八十项全量回归零失败，多轮SIT、UAT加独立质检准出；交付，麒麟V10操作系统一键部署包，加十三份文档体系。随时可以上线。</a:t>
+            </a:r>
+          </a:p>
+        </p:txBody>
+      </p:sp>
+      <p:sp>
+        <p:nvSpPr>
+          <p:cNvPr id="4" name="Slide Number Placeholder 3"/>
+          <p:cNvSpPr>
+            <a:spLocks noGrp="1"/>
+          </p:cNvSpPr>
+          <p:nvPr>
+            <p:ph type="sldNum" idx="5" sz="quarter"/>
+          </p:nvPr>
+        </p:nvSpPr>
+        <p:spPr/>
+      </p:sp>
+    </p:spTree>
+  </p:cSld>
+  <p:clrMapOvr>
+    <a:masterClrMapping/>
+  </p:clrMapOvr>
+</p:notes>
+</file>
+
+<file path=ppt/notesSlides/notesSlide27.xml><?xml version="1.0" encoding="utf-8"?>
+<p:notes xmlns:a="http://schemas.openxmlformats.org/drawingml/2006/main" xmlns:p="http://schemas.openxmlformats.org/presentationml/2006/main" xmlns:r="http://schemas.openxmlformats.org/officeDocument/2006/relationships">
+  <p:cSld>
+    <p:spTree>
+      <p:nvGrpSpPr>
+        <p:cNvPr id="1" name=""/>
+        <p:cNvGrpSpPr/>
+        <p:nvPr/>
+      </p:nvGrpSpPr>
+      <p:grpSpPr>
+        <a:xfrm>
+          <a:off x="0" y="0"/>
+          <a:ext cx="0" cy="0"/>
+          <a:chOff x="0" y="0"/>
+          <a:chExt cx="0" cy="0"/>
+        </a:xfrm>
+      </p:grpSpPr>
+      <p:sp>
+        <p:nvSpPr>
+          <p:cNvPr id="2" name="Slide Image Placeholder 1"/>
+          <p:cNvSpPr>
+            <a:spLocks noGrp="1"/>
+          </p:cNvSpPr>
+          <p:nvPr>
+            <p:ph type="sldImg" idx="2"/>
+          </p:nvPr>
+        </p:nvSpPr>
+        <p:spPr/>
+      </p:sp>
+      <p:sp>
+        <p:nvSpPr>
+          <p:cNvPr id="3" name="Notes Placeholder 2"/>
+          <p:cNvSpPr>
+            <a:spLocks noGrp="1"/>
+          </p:cNvSpPr>
+          <p:nvPr>
+            <p:ph type="body" idx="3" sz="quarter"/>
+          </p:nvPr>
+        </p:nvSpPr>
+        <p:spPr/>
+        <p:txBody>
+          <a:bodyPr/>
+          <a:lstStyle/>
+          <a:p>
+            <a:r>
+              <a:t>效率对比，同样的活，时间轴完全不同。</a:t>
+            </a:r>
+          </a:p>
+          <a:p>
+            <a:r>
+              <a:t>架构设计，传统两到三周，AI协作三天；规则引擎开发，传统两到三个月，AI两周；Oracle迁移规则，传统一到两个月，AI一周；前端十九个页面，传统一到两个月，AI一周；八百八十个用例的全量测试，传统要两到四周，AI是自动执行的。</a:t>
+            </a:r>
+          </a:p>
+          <a:p>
+            <a:r>
+              <a:t>汇总起来看最下面：传统方式六到十二个月的项目，AI协作八周完成，整体提速三到六倍。</a:t>
+            </a:r>
+          </a:p>
+        </p:txBody>
+      </p:sp>
+      <p:sp>
+        <p:nvSpPr>
+          <p:cNvPr id="4" name="Slide Number Placeholder 3"/>
+          <p:cNvSpPr>
+            <a:spLocks noGrp="1"/>
+          </p:cNvSpPr>
+          <p:nvPr>
+            <p:ph type="sldNum" idx="5" sz="quarter"/>
+          </p:nvPr>
+        </p:nvSpPr>
+        <p:spPr/>
+      </p:sp>
+    </p:spTree>
+  </p:cSld>
+  <p:clrMapOvr>
+    <a:masterClrMapping/>
+  </p:clrMapOvr>
+</p:notes>
+</file>
+
+<file path=ppt/notesSlides/notesSlide28.xml><?xml version="1.0" encoding="utf-8"?>
+<p:notes xmlns:a="http://schemas.openxmlformats.org/drawingml/2006/main" xmlns:p="http://schemas.openxmlformats.org/presentationml/2006/main" xmlns:r="http://schemas.openxmlformats.org/officeDocument/2006/relationships">
+  <p:cSld>
+    <p:spTree>
+      <p:nvGrpSpPr>
+        <p:cNvPr id="1" name=""/>
+        <p:cNvGrpSpPr/>
+        <p:nvPr/>
+      </p:nvGrpSpPr>
+      <p:grpSpPr>
+        <a:xfrm>
+          <a:off x="0" y="0"/>
+          <a:ext cx="0" cy="0"/>
+          <a:chOff x="0" y="0"/>
+          <a:chExt cx="0" cy="0"/>
+        </a:xfrm>
+      </p:grpSpPr>
+      <p:sp>
+        <p:nvSpPr>
+          <p:cNvPr id="2" name="Slide Image Placeholder 1"/>
+          <p:cNvSpPr>
+            <a:spLocks noGrp="1"/>
+          </p:cNvSpPr>
+          <p:nvPr>
+            <p:ph type="sldImg" idx="2"/>
+          </p:nvPr>
+        </p:nvSpPr>
+        <p:spPr/>
+      </p:sp>
+      <p:sp>
+        <p:nvSpPr>
+          <p:cNvPr id="3" name="Notes Placeholder 2"/>
+          <p:cNvSpPr>
+            <a:spLocks noGrp="1"/>
+          </p:cNvSpPr>
+          <p:nvPr>
+            <p:ph type="body" idx="3" sz="quarter"/>
+          </p:nvPr>
+        </p:nvSpPr>
+        <p:spPr/>
+        <p:txBody>
+          <a:bodyPr/>
+          <a:lstStyle/>
+          <a:p>
+            <a:r>
+              <a:t>再算经济账。</a:t>
+            </a:r>
+          </a:p>
+          <a:p>
+            <a:r>
+              <a:t>买商业产品，一年三十到八十万；外包开发，五十到一百五十万；自建一个三到五人的团队，一年一百到两百万。而我加AI工具这条路——零额外人力成本，八周交付。</a:t>
+            </a:r>
+          </a:p>
+          <a:p>
+            <a:r>
+              <a:t>按最保守的口径，这个项目直接节省了至少五十万元的开发成本，和六个月的时间成本。还有一笔更大的隐性收益：SQL缺陷从此在上线前被拦截，生产事故和救火成本会持续下降——这笔账难以精确估量，但真实存在。</a:t>
+            </a:r>
+          </a:p>
+        </p:txBody>
+      </p:sp>
+      <p:sp>
+        <p:nvSpPr>
+          <p:cNvPr id="4" name="Slide Number Placeholder 3"/>
+          <p:cNvSpPr>
+            <a:spLocks noGrp="1"/>
+          </p:cNvSpPr>
+          <p:nvPr>
+            <p:ph type="sldNum" idx="5" sz="quarter"/>
+          </p:nvPr>
+        </p:nvSpPr>
+        <p:spPr/>
+      </p:sp>
+    </p:spTree>
+  </p:cSld>
+  <p:clrMapOvr>
+    <a:masterClrMapping/>
+  </p:clrMapOvr>
+</p:notes>
+</file>
+
+<file path=ppt/notesSlides/notesSlide29.xml><?xml version="1.0" encoding="utf-8"?>
+<p:notes xmlns:a="http://schemas.openxmlformats.org/drawingml/2006/main" xmlns:p="http://schemas.openxmlformats.org/presentationml/2006/main" xmlns:r="http://schemas.openxmlformats.org/officeDocument/2006/relationships">
+  <p:cSld>
+    <p:spTree>
+      <p:nvGrpSpPr>
+        <p:cNvPr id="1" name=""/>
+        <p:cNvGrpSpPr/>
+        <p:nvPr/>
+      </p:nvGrpSpPr>
+      <p:grpSpPr>
+        <a:xfrm>
+          <a:off x="0" y="0"/>
+          <a:ext cx="0" cy="0"/>
+          <a:chOff x="0" y="0"/>
+          <a:chExt cx="0" cy="0"/>
+        </a:xfrm>
+      </p:grpSpPr>
+      <p:sp>
+        <p:nvSpPr>
+          <p:cNvPr id="2" name="Slide Image Placeholder 1"/>
+          <p:cNvSpPr>
+            <a:spLocks noGrp="1"/>
+          </p:cNvSpPr>
+          <p:nvPr>
+            <p:ph type="sldImg" idx="2"/>
+          </p:nvPr>
+        </p:nvSpPr>
+        <p:spPr/>
+      </p:sp>
+      <p:sp>
+        <p:nvSpPr>
+          <p:cNvPr id="3" name="Notes Placeholder 2"/>
+          <p:cNvSpPr>
+            <a:spLocks noGrp="1"/>
+          </p:cNvSpPr>
+          <p:nvPr>
+            <p:ph type="body" idx="3" sz="quarter"/>
+          </p:nvPr>
+        </p:nvSpPr>
+        <p:spPr/>
+        <p:txBody>
+          <a:bodyPr/>
+          <a:lstStyle/>
+          <a:p>
+            <a:r>
+              <a:t>最后一部分，谈谈这次实践对我个人能力的提升，以及给部门的推广建议。</a:t>
+            </a:r>
+          </a:p>
+        </p:txBody>
+      </p:sp>
+      <p:sp>
+        <p:nvSpPr>
+          <p:cNvPr id="4" name="Slide Number Placeholder 3"/>
+          <p:cNvSpPr>
+            <a:spLocks noGrp="1"/>
+          </p:cNvSpPr>
+          <p:nvPr>
+            <p:ph type="sldNum" idx="5" sz="quarter"/>
+          </p:nvPr>
+        </p:nvSpPr>
+        <p:spPr/>
+      </p:sp>
+    </p:spTree>
+  </p:cSld>
+  <p:clrMapOvr>
+    <a:masterClrMapping/>
+  </p:clrMapOvr>
+</p:notes>
+</file>
+
+<file path=ppt/notesSlides/notesSlide3.xml><?xml version="1.0" encoding="utf-8"?>
+<p:notes xmlns:a="http://schemas.openxmlformats.org/drawingml/2006/main" xmlns:p="http://schemas.openxmlformats.org/presentationml/2006/main" xmlns:r="http://schemas.openxmlformats.org/officeDocument/2006/relationships">
+  <p:cSld>
+    <p:spTree>
+      <p:nvGrpSpPr>
+        <p:cNvPr id="1" name=""/>
+        <p:cNvGrpSpPr/>
+        <p:nvPr/>
+      </p:nvGrpSpPr>
+      <p:grpSpPr>
+        <a:xfrm>
+          <a:off x="0" y="0"/>
+          <a:ext cx="0" cy="0"/>
+          <a:chOff x="0" y="0"/>
+          <a:chExt cx="0" cy="0"/>
+        </a:xfrm>
+      </p:grpSpPr>
+      <p:sp>
+        <p:nvSpPr>
+          <p:cNvPr id="2" name="Slide Image Placeholder 1"/>
+          <p:cNvSpPr>
+            <a:spLocks noGrp="1"/>
+          </p:cNvSpPr>
+          <p:nvPr>
+            <p:ph type="sldImg" idx="2"/>
+          </p:nvPr>
+        </p:nvSpPr>
+        <p:spPr/>
+      </p:sp>
+      <p:sp>
+        <p:nvSpPr>
+          <p:cNvPr id="3" name="Notes Placeholder 2"/>
+          <p:cNvSpPr>
+            <a:spLocks noGrp="1"/>
+          </p:cNvSpPr>
+          <p:nvPr>
+            <p:ph type="body" idx="3" sz="quarter"/>
+          </p:nvPr>
+        </p:nvSpPr>
+        <p:spPr/>
+        <p:txBody>
+          <a:bodyPr/>
+          <a:lstStyle/>
+          <a:p>
+            <a:r>
+              <a:t>先看第一部分，背景与挑战。一句话概括：最懂需求的人，不会写代码。这曾经是我的困境，我相信也是在座很多专业岗位同事共同的困境。</a:t>
+            </a:r>
+          </a:p>
+        </p:txBody>
+      </p:sp>
+      <p:sp>
+        <p:nvSpPr>
+          <p:cNvPr id="4" name="Slide Number Placeholder 3"/>
+          <p:cNvSpPr>
+            <a:spLocks noGrp="1"/>
+          </p:cNvSpPr>
+          <p:nvPr>
+            <p:ph type="sldNum" idx="5" sz="quarter"/>
+          </p:nvPr>
+        </p:nvSpPr>
+        <p:spPr/>
+      </p:sp>
+    </p:spTree>
+  </p:cSld>
+  <p:clrMapOvr>
+    <a:masterClrMapping/>
+  </p:clrMapOvr>
+</p:notes>
+</file>
+
+<file path=ppt/notesSlides/notesSlide30.xml><?xml version="1.0" encoding="utf-8"?>
+<p:notes xmlns:a="http://schemas.openxmlformats.org/drawingml/2006/main" xmlns:p="http://schemas.openxmlformats.org/presentationml/2006/main" xmlns:r="http://schemas.openxmlformats.org/officeDocument/2006/relationships">
+  <p:cSld>
+    <p:spTree>
+      <p:nvGrpSpPr>
+        <p:cNvPr id="1" name=""/>
+        <p:cNvGrpSpPr/>
+        <p:nvPr/>
+      </p:nvGrpSpPr>
+      <p:grpSpPr>
+        <a:xfrm>
+          <a:off x="0" y="0"/>
+          <a:ext cx="0" cy="0"/>
+          <a:chOff x="0" y="0"/>
+          <a:chExt cx="0" cy="0"/>
+        </a:xfrm>
+      </p:grpSpPr>
+      <p:sp>
+        <p:nvSpPr>
+          <p:cNvPr id="2" name="Slide Image Placeholder 1"/>
+          <p:cNvSpPr>
+            <a:spLocks noGrp="1"/>
+          </p:cNvSpPr>
+          <p:nvPr>
+            <p:ph type="sldImg" idx="2"/>
+          </p:nvPr>
+        </p:nvSpPr>
+        <p:spPr/>
+      </p:sp>
+      <p:sp>
+        <p:nvSpPr>
+          <p:cNvPr id="3" name="Notes Placeholder 2"/>
+          <p:cNvSpPr>
+            <a:spLocks noGrp="1"/>
+          </p:cNvSpPr>
+          <p:nvPr>
+            <p:ph type="body" idx="3" sz="quarter"/>
+          </p:nvPr>
+        </p:nvSpPr>
+        <p:spPr/>
+        <p:txBody>
+          <a:bodyPr/>
+          <a:lstStyle/>
+          <a:p>
+            <a:r>
+              <a:t>先说AI怎么提升了我。四个维度的跃迁：</a:t>
+            </a:r>
+          </a:p>
+          <a:p>
+            <a:r>
+              <a:t>从DBA到全栈交付者——过去我只会SQL运维，现在能独立交付完整的软件产品；从执行者到架构师——过去执行运维任务，现在设计系统架构、指挥AI团队；从个人到团队——过去是一个人的能力边界，现在一个人就是一个生产力团队；从被动到主动——过去问题来了再救火，现在主动构建工具去预防问题。</a:t>
+            </a:r>
+          </a:p>
+          <a:p>
+            <a:r>
+              <a:t>这四个跃迁，不是AI赐予的，是我在指挥AI的过程中被倒逼出来的。</a:t>
+            </a:r>
+          </a:p>
+        </p:txBody>
+      </p:sp>
+      <p:sp>
+        <p:nvSpPr>
+          <p:cNvPr id="4" name="Slide Number Placeholder 3"/>
+          <p:cNvSpPr>
+            <a:spLocks noGrp="1"/>
+          </p:cNvSpPr>
+          <p:nvPr>
+            <p:ph type="sldNum" idx="5" sz="quarter"/>
+          </p:nvPr>
+        </p:nvSpPr>
+        <p:spPr/>
+      </p:sp>
+    </p:spTree>
+  </p:cSld>
+  <p:clrMapOvr>
+    <a:masterClrMapping/>
+  </p:clrMapOvr>
+</p:notes>
+</file>
+
+<file path=ppt/notesSlides/notesSlide31.xml><?xml version="1.0" encoding="utf-8"?>
+<p:notes xmlns:a="http://schemas.openxmlformats.org/drawingml/2006/main" xmlns:p="http://schemas.openxmlformats.org/presentationml/2006/main" xmlns:r="http://schemas.openxmlformats.org/officeDocument/2006/relationships">
+  <p:cSld>
+    <p:spTree>
+      <p:nvGrpSpPr>
+        <p:cNvPr id="1" name=""/>
+        <p:cNvGrpSpPr/>
+        <p:nvPr/>
+      </p:nvGrpSpPr>
+      <p:grpSpPr>
+        <a:xfrm>
+          <a:off x="0" y="0"/>
+          <a:ext cx="0" cy="0"/>
+          <a:chOff x="0" y="0"/>
+          <a:chExt cx="0" cy="0"/>
+        </a:xfrm>
+      </p:grpSpPr>
+      <p:sp>
+        <p:nvSpPr>
+          <p:cNvPr id="2" name="Slide Image Placeholder 1"/>
+          <p:cNvSpPr>
+            <a:spLocks noGrp="1"/>
+          </p:cNvSpPr>
+          <p:nvPr>
+            <p:ph type="sldImg" idx="2"/>
+          </p:nvPr>
+        </p:nvSpPr>
+        <p:spPr/>
+      </p:sp>
+      <p:sp>
+        <p:nvSpPr>
+          <p:cNvPr id="3" name="Notes Placeholder 2"/>
+          <p:cNvSpPr>
+            <a:spLocks noGrp="1"/>
+          </p:cNvSpPr>
+          <p:nvPr>
+            <p:ph type="body" idx="3" sz="quarter"/>
+          </p:nvPr>
+        </p:nvSpPr>
+        <p:spPr/>
+        <p:txBody>
+          <a:bodyPr/>
+          <a:lstStyle/>
+          <a:p>
+            <a:r>
+              <a:t>但我更想强调的是这一页：为什么必须"专家驱动"？因为有五项能力，AI一项都替代不了。</a:t>
+            </a:r>
+          </a:p>
+          <a:p>
+            <a:r>
+              <a:t>需求定义——我知道DBA真正需要什么工具；架构设计——我能设计出一百一十九条规则的完整体系；质量判断——我能判断AI的输出到没到生产级；业务理解——Oracle迁移的每一个技术细节我都懂；优先级决策——我知道什么最重要、什么可以延后。</a:t>
+            </a:r>
+          </a:p>
+          <a:p>
+            <a:r>
+              <a:t>请注意：这五项能力，恰恰是咱们部门每一位领域专家已经具备的。也就是说，在座每一位专家，都具备复制这个实践的核心条件。</a:t>
+            </a:r>
+          </a:p>
+        </p:txBody>
+      </p:sp>
+      <p:sp>
+        <p:nvSpPr>
+          <p:cNvPr id="4" name="Slide Number Placeholder 3"/>
+          <p:cNvSpPr>
+            <a:spLocks noGrp="1"/>
+          </p:cNvSpPr>
+          <p:nvPr>
+            <p:ph type="sldNum" idx="5" sz="quarter"/>
+          </p:nvPr>
+        </p:nvSpPr>
+        <p:spPr/>
+      </p:sp>
+    </p:spTree>
+  </p:cSld>
+  <p:clrMapOvr>
+    <a:masterClrMapping/>
+  </p:clrMapOvr>
+</p:notes>
+</file>
+
+<file path=ppt/notesSlides/notesSlide32.xml><?xml version="1.0" encoding="utf-8"?>
+<p:notes xmlns:a="http://schemas.openxmlformats.org/drawingml/2006/main" xmlns:p="http://schemas.openxmlformats.org/presentationml/2006/main" xmlns:r="http://schemas.openxmlformats.org/officeDocument/2006/relationships">
+  <p:cSld>
+    <p:spTree>
+      <p:nvGrpSpPr>
+        <p:cNvPr id="1" name=""/>
+        <p:cNvGrpSpPr/>
+        <p:nvPr/>
+      </p:nvGrpSpPr>
+      <p:grpSpPr>
+        <a:xfrm>
+          <a:off x="0" y="0"/>
+          <a:ext cx="0" cy="0"/>
+          <a:chOff x="0" y="0"/>
+          <a:chExt cx="0" cy="0"/>
+        </a:xfrm>
+      </p:grpSpPr>
+      <p:sp>
+        <p:nvSpPr>
+          <p:cNvPr id="2" name="Slide Image Placeholder 1"/>
+          <p:cNvSpPr>
+            <a:spLocks noGrp="1"/>
+          </p:cNvSpPr>
+          <p:nvPr>
+            <p:ph type="sldImg" idx="2"/>
+          </p:nvPr>
+        </p:nvSpPr>
+        <p:spPr/>
+      </p:sp>
+      <p:sp>
+        <p:nvSpPr>
+          <p:cNvPr id="3" name="Notes Placeholder 2"/>
+          <p:cNvSpPr>
+            <a:spLocks noGrp="1"/>
+          </p:cNvSpPr>
+          <p:nvPr>
+            <p:ph type="body" idx="3" sz="quarter"/>
+          </p:nvPr>
+        </p:nvSpPr>
+        <p:spPr/>
+        <p:txBody>
+          <a:bodyPr/>
+          <a:lstStyle/>
+          <a:p>
+            <a:r>
+              <a:t>所以这套方法论完全可以复制。</a:t>
+            </a:r>
+          </a:p>
+          <a:p>
+            <a:r>
+              <a:t>左边是岗位映射：DBA可以做SQL审核、慢SQL平台；网络工程师可以做网络监控、故障自动诊断；安全工程师可以做漏洞扫描、合规检查；运维工程师可以做CMDB、自动化运维平台；业务分析师可以做数据分析工具。</a:t>
+            </a:r>
+          </a:p>
+          <a:p>
+            <a:r>
+              <a:t>右边是我对部门的五点建议：机制上，建立"AI加专家"的项目孵化机制；培训上，开展提示词工程培训，推广五步方法论；工具上，统一AI平台、建立智能体协作规范；激励上，把AI协作创新纳入绩效、设创新实践奖；知识上，建案例库，沉淀方法论和提示词模板。</a:t>
+            </a:r>
+          </a:p>
+        </p:txBody>
+      </p:sp>
+      <p:sp>
+        <p:nvSpPr>
+          <p:cNvPr id="4" name="Slide Number Placeholder 3"/>
+          <p:cNvSpPr>
+            <a:spLocks noGrp="1"/>
+          </p:cNvSpPr>
+          <p:nvPr>
+            <p:ph type="sldNum" idx="5" sz="quarter"/>
+          </p:nvPr>
+        </p:nvSpPr>
+        <p:spPr/>
+      </p:sp>
+    </p:spTree>
+  </p:cSld>
+  <p:clrMapOvr>
+    <a:masterClrMapping/>
+  </p:clrMapOvr>
+</p:notes>
+</file>
+
+<file path=ppt/notesSlides/notesSlide33.xml><?xml version="1.0" encoding="utf-8"?>
+<p:notes xmlns:a="http://schemas.openxmlformats.org/drawingml/2006/main" xmlns:p="http://schemas.openxmlformats.org/presentationml/2006/main" xmlns:r="http://schemas.openxmlformats.org/officeDocument/2006/relationships">
+  <p:cSld>
+    <p:spTree>
+      <p:nvGrpSpPr>
+        <p:cNvPr id="1" name=""/>
+        <p:cNvGrpSpPr/>
+        <p:nvPr/>
+      </p:nvGrpSpPr>
+      <p:grpSpPr>
+        <a:xfrm>
+          <a:off x="0" y="0"/>
+          <a:ext cx="0" cy="0"/>
+          <a:chOff x="0" y="0"/>
+          <a:chExt cx="0" cy="0"/>
+        </a:xfrm>
+      </p:grpSpPr>
+      <p:sp>
+        <p:nvSpPr>
+          <p:cNvPr id="2" name="Slide Image Placeholder 1"/>
+          <p:cNvSpPr>
+            <a:spLocks noGrp="1"/>
+          </p:cNvSpPr>
+          <p:nvPr>
+            <p:ph type="sldImg" idx="2"/>
+          </p:nvPr>
+        </p:nvSpPr>
+        <p:spPr/>
+      </p:sp>
+      <p:sp>
+        <p:nvSpPr>
+          <p:cNvPr id="3" name="Notes Placeholder 2"/>
+          <p:cNvSpPr>
+            <a:spLocks noGrp="1"/>
+          </p:cNvSpPr>
+          <p:nvPr>
+            <p:ph type="body" idx="3" sz="quarter"/>
+          </p:nvPr>
+        </p:nvSpPr>
+        <p:spPr/>
+        <p:txBody>
+          <a:bodyPr/>
+          <a:lstStyle/>
+          <a:p>
+            <a:r>
+              <a:t>最后，用三句话结束今天的汇报。</a:t>
+            </a:r>
+          </a:p>
+          <a:p>
+            <a:r>
+              <a:t>这不是一个程序员的故事，而是一个DBA用专家智慧指挥AI团队的故事。我没有写一行代码，但我设计了一百一十九条规则的完整体系，定义了四十二条迁移规范的技术细节，审核了每一轮测试报告，做出了每一次质量裁决。</a:t>
+            </a:r>
+          </a:p>
+          <a:p>
+            <a:r>
+              <a:t>AI是放大器——它放大了专家能力，而不是替代了专家能力。</a:t>
+            </a:r>
+          </a:p>
+          <a:p>
+            <a:r>
+              <a:t>一个人加AI，等于一个生产力团队。这不是未来的愿景，而是今天正在发生的现实。它今天发生在数据库运维领域，明天就可以发生在咱们部门的每一个专业领域。</a:t>
+            </a:r>
+          </a:p>
+          <a:p>
+            <a:r>
+              <a:t>我的汇报到此结束，感谢聆听，欢迎各位领导同事批评指正。</a:t>
+            </a:r>
+          </a:p>
+        </p:txBody>
+      </p:sp>
+      <p:sp>
+        <p:nvSpPr>
+          <p:cNvPr id="4" name="Slide Number Placeholder 3"/>
+          <p:cNvSpPr>
+            <a:spLocks noGrp="1"/>
+          </p:cNvSpPr>
+          <p:nvPr>
+            <p:ph type="sldNum" idx="5" sz="quarter"/>
+          </p:nvPr>
+        </p:nvSpPr>
+        <p:spPr/>
+      </p:sp>
+    </p:spTree>
+  </p:cSld>
+  <p:clrMapOvr>
+    <a:masterClrMapping/>
+  </p:clrMapOvr>
+</p:notes>
+</file>
+
+<file path=ppt/notesSlides/notesSlide4.xml><?xml version="1.0" encoding="utf-8"?>
+<p:notes xmlns:a="http://schemas.openxmlformats.org/drawingml/2006/main" xmlns:p="http://schemas.openxmlformats.org/presentationml/2006/main" xmlns:r="http://schemas.openxmlformats.org/officeDocument/2006/relationships">
+  <p:cSld>
+    <p:spTree>
+      <p:nvGrpSpPr>
+        <p:cNvPr id="1" name=""/>
+        <p:cNvGrpSpPr/>
+        <p:nvPr/>
+      </p:nvGrpSpPr>
+      <p:grpSpPr>
+        <a:xfrm>
+          <a:off x="0" y="0"/>
+          <a:ext cx="0" cy="0"/>
+          <a:chOff x="0" y="0"/>
+          <a:chExt cx="0" cy="0"/>
+        </a:xfrm>
+      </p:grpSpPr>
+      <p:sp>
+        <p:nvSpPr>
+          <p:cNvPr id="2" name="Slide Image Placeholder 1"/>
+          <p:cNvSpPr>
+            <a:spLocks noGrp="1"/>
+          </p:cNvSpPr>
+          <p:nvPr>
+            <p:ph type="sldImg" idx="2"/>
+          </p:nvPr>
+        </p:nvSpPr>
+        <p:spPr/>
+      </p:sp>
+      <p:sp>
+        <p:nvSpPr>
+          <p:cNvPr id="3" name="Notes Placeholder 2"/>
+          <p:cNvSpPr>
+            <a:spLocks noGrp="1"/>
+          </p:cNvSpPr>
+          <p:nvPr>
+            <p:ph type="body" idx="3" sz="quarter"/>
+          </p:nvPr>
+        </p:nvSpPr>
+        <p:spPr/>
+        <p:txBody>
+          <a:bodyPr/>
+          <a:lstStyle/>
+          <a:p>
+            <a:r>
+              <a:t>作为DBA，我们日常运维面临三大痛点。</a:t>
+            </a:r>
+          </a:p>
+          <a:p>
+            <a:r>
+              <a:t>第一，SQL质量管控缺失。开发提交的SQL没有经过审核就直接上线，生产事故时有发生，救火成了常态。</a:t>
+            </a:r>
+          </a:p>
+          <a:p>
+            <a:r>
+              <a:t>第二，Oracle迁移适配难。业务系统从Oracle迁到TDSQL，原厂文档里有四十多类不兼容语法，靠人工逐条排查，效率极低还容易漏。</a:t>
+            </a:r>
+          </a:p>
+          <a:p>
+            <a:r>
+              <a:t>第三，慢SQL治理是被动的，只能等问题暴露了再处理。</a:t>
+            </a:r>
+          </a:p>
+          <a:p>
+            <a:r>
+              <a:t>这三个痛点指向同一个根源：SQL的质量问题必须在上线前拦截，而拦截，需要一套自动化的、真正懂TDSQL的审核工具。</a:t>
+            </a:r>
+          </a:p>
+        </p:txBody>
+      </p:sp>
+      <p:sp>
+        <p:nvSpPr>
+          <p:cNvPr id="4" name="Slide Number Placeholder 3"/>
+          <p:cNvSpPr>
+            <a:spLocks noGrp="1"/>
+          </p:cNvSpPr>
+          <p:nvPr>
+            <p:ph type="sldNum" idx="5" sz="quarter"/>
+          </p:nvPr>
+        </p:nvSpPr>
+        <p:spPr/>
+      </p:sp>
+    </p:spTree>
+  </p:cSld>
+  <p:clrMapOvr>
+    <a:masterClrMapping/>
+  </p:clrMapOvr>
+</p:notes>
+</file>
+
+<file path=ppt/notesSlides/notesSlide5.xml><?xml version="1.0" encoding="utf-8"?>
+<p:notes xmlns:a="http://schemas.openxmlformats.org/drawingml/2006/main" xmlns:p="http://schemas.openxmlformats.org/presentationml/2006/main" xmlns:r="http://schemas.openxmlformats.org/officeDocument/2006/relationships">
+  <p:cSld>
+    <p:spTree>
+      <p:nvGrpSpPr>
+        <p:cNvPr id="1" name=""/>
+        <p:cNvGrpSpPr/>
+        <p:nvPr/>
+      </p:nvGrpSpPr>
+      <p:grpSpPr>
+        <a:xfrm>
+          <a:off x="0" y="0"/>
+          <a:ext cx="0" cy="0"/>
+          <a:chOff x="0" y="0"/>
+          <a:chExt cx="0" cy="0"/>
+        </a:xfrm>
+      </p:grpSpPr>
+      <p:sp>
+        <p:nvSpPr>
+          <p:cNvPr id="2" name="Slide Image Placeholder 1"/>
+          <p:cNvSpPr>
+            <a:spLocks noGrp="1"/>
+          </p:cNvSpPr>
+          <p:nvPr>
+            <p:ph type="sldImg" idx="2"/>
+          </p:nvPr>
+        </p:nvSpPr>
+        <p:spPr/>
+      </p:sp>
+      <p:sp>
+        <p:nvSpPr>
+          <p:cNvPr id="3" name="Notes Placeholder 2"/>
+          <p:cNvSpPr>
+            <a:spLocks noGrp="1"/>
+          </p:cNvSpPr>
+          <p:nvPr>
+            <p:ph type="body" idx="3" sz="quarter"/>
+          </p:nvPr>
+        </p:nvSpPr>
+        <p:spPr/>
+        <p:txBody>
+          <a:bodyPr/>
+          <a:lstStyle/>
+          <a:p>
+            <a:r>
+              <a:t>要这套工具，传统上有三条路，但条条走不通。</a:t>
+            </a:r>
+          </a:p>
+          <a:p>
+            <a:r>
+              <a:t>买商业产品——年费几十万，还很难适配咱们行内的TDSQL环境；找外包——沟通成本高、周期长，以后维护还受制于人；自己开发——问题来了，我是DBA，是数据库运维的专家，但编程，我是一窍不通的。</a:t>
+            </a:r>
+          </a:p>
+          <a:p>
+            <a:r>
+              <a:t>这就是屏幕下方这句话，我称之为核心矛盾：最懂业务需求的人，不具备编程能力；有编程能力的人，又不理解DBA的专业需求。这个矛盾，过去是无解的。</a:t>
+            </a:r>
+          </a:p>
+        </p:txBody>
+      </p:sp>
+      <p:sp>
+        <p:nvSpPr>
+          <p:cNvPr id="4" name="Slide Number Placeholder 3"/>
+          <p:cNvSpPr>
+            <a:spLocks noGrp="1"/>
+          </p:cNvSpPr>
+          <p:nvPr>
+            <p:ph type="sldNum" idx="5" sz="quarter"/>
+          </p:nvPr>
+        </p:nvSpPr>
+        <p:spPr/>
+      </p:sp>
+    </p:spTree>
+  </p:cSld>
+  <p:clrMapOvr>
+    <a:masterClrMapping/>
+  </p:clrMapOvr>
+</p:notes>
+</file>
+
+<file path=ppt/notesSlides/notesSlide6.xml><?xml version="1.0" encoding="utf-8"?>
+<p:notes xmlns:a="http://schemas.openxmlformats.org/drawingml/2006/main" xmlns:p="http://schemas.openxmlformats.org/presentationml/2006/main" xmlns:r="http://schemas.openxmlformats.org/officeDocument/2006/relationships">
+  <p:cSld>
+    <p:spTree>
+      <p:nvGrpSpPr>
+        <p:cNvPr id="1" name=""/>
+        <p:cNvGrpSpPr/>
+        <p:nvPr/>
+      </p:nvGrpSpPr>
+      <p:grpSpPr>
+        <a:xfrm>
+          <a:off x="0" y="0"/>
+          <a:ext cx="0" cy="0"/>
+          <a:chOff x="0" y="0"/>
+          <a:chExt cx="0" cy="0"/>
+        </a:xfrm>
+      </p:grpSpPr>
+      <p:sp>
+        <p:nvSpPr>
+          <p:cNvPr id="2" name="Slide Image Placeholder 1"/>
+          <p:cNvSpPr>
+            <a:spLocks noGrp="1"/>
+          </p:cNvSpPr>
+          <p:nvPr>
+            <p:ph type="sldImg" idx="2"/>
+          </p:nvPr>
+        </p:nvSpPr>
+        <p:spPr/>
+      </p:sp>
+      <p:sp>
+        <p:nvSpPr>
+          <p:cNvPr id="3" name="Notes Placeholder 2"/>
+          <p:cNvSpPr>
+            <a:spLocks noGrp="1"/>
+          </p:cNvSpPr>
+          <p:nvPr>
+            <p:ph type="body" idx="3" sz="quarter"/>
+          </p:nvPr>
+        </p:nvSpPr>
+        <p:spPr/>
+        <p:txBody>
+          <a:bodyPr/>
+          <a:lstStyle/>
+          <a:p>
+            <a:r>
+              <a:t>AI给了我一个破局的机会。我当时的想法很朴素：我懂TDSQL的每一个技术细节和运维规范，我能设计出完整的审核规则体系和架构方案——我缺的只是把设计变成代码的那双手。而AI，恰恰就是这双手。</a:t>
+            </a:r>
+          </a:p>
+          <a:p>
+            <a:r>
+              <a:t>于是我做了一个大胆的假设：一个人，加上AI工具，能不能等于一个完整的生产力团队？</a:t>
+            </a:r>
+          </a:p>
+          <a:p>
+            <a:r>
+              <a:t>接下来的八周，验证了这个假设。</a:t>
+            </a:r>
+          </a:p>
+        </p:txBody>
+      </p:sp>
+      <p:sp>
+        <p:nvSpPr>
+          <p:cNvPr id="4" name="Slide Number Placeholder 3"/>
+          <p:cNvSpPr>
+            <a:spLocks noGrp="1"/>
+          </p:cNvSpPr>
+          <p:nvPr>
+            <p:ph type="sldNum" idx="5" sz="quarter"/>
+          </p:nvPr>
+        </p:nvSpPr>
+        <p:spPr/>
+      </p:sp>
+    </p:spTree>
+  </p:cSld>
+  <p:clrMapOvr>
+    <a:masterClrMapping/>
+  </p:clrMapOvr>
+</p:notes>
+</file>
+
+<file path=ppt/notesSlides/notesSlide7.xml><?xml version="1.0" encoding="utf-8"?>
+<p:notes xmlns:a="http://schemas.openxmlformats.org/drawingml/2006/main" xmlns:p="http://schemas.openxmlformats.org/presentationml/2006/main" xmlns:r="http://schemas.openxmlformats.org/officeDocument/2006/relationships">
+  <p:cSld>
+    <p:spTree>
+      <p:nvGrpSpPr>
+        <p:cNvPr id="1" name=""/>
+        <p:cNvGrpSpPr/>
+        <p:nvPr/>
+      </p:nvGrpSpPr>
+      <p:grpSpPr>
+        <a:xfrm>
+          <a:off x="0" y="0"/>
+          <a:ext cx="0" cy="0"/>
+          <a:chOff x="0" y="0"/>
+          <a:chExt cx="0" cy="0"/>
+        </a:xfrm>
+      </p:grpSpPr>
+      <p:sp>
+        <p:nvSpPr>
+          <p:cNvPr id="2" name="Slide Image Placeholder 1"/>
+          <p:cNvSpPr>
+            <a:spLocks noGrp="1"/>
+          </p:cNvSpPr>
+          <p:nvPr>
+            <p:ph type="sldImg" idx="2"/>
+          </p:nvPr>
+        </p:nvSpPr>
+        <p:spPr/>
+      </p:sp>
+      <p:sp>
+        <p:nvSpPr>
+          <p:cNvPr id="3" name="Notes Placeholder 2"/>
+          <p:cNvSpPr>
+            <a:spLocks noGrp="1"/>
+          </p:cNvSpPr>
+          <p:nvPr>
+            <p:ph type="body" idx="3" sz="quarter"/>
+          </p:nvPr>
+        </p:nvSpPr>
+        <p:spPr/>
+        <p:txBody>
+          <a:bodyPr/>
+          <a:lstStyle/>
+          <a:p>
+            <a:r>
+              <a:t>第二部分，方法论。这是今天汇报的核心。我想先说结论：用好AI的关键，是把AI当团队来管理，而不是当工具来使用。</a:t>
+            </a:r>
+          </a:p>
+        </p:txBody>
+      </p:sp>
+      <p:sp>
+        <p:nvSpPr>
+          <p:cNvPr id="4" name="Slide Number Placeholder 3"/>
+          <p:cNvSpPr>
+            <a:spLocks noGrp="1"/>
+          </p:cNvSpPr>
+          <p:nvPr>
+            <p:ph type="sldNum" idx="5" sz="quarter"/>
+          </p:nvPr>
+        </p:nvSpPr>
+        <p:spPr/>
+      </p:sp>
+    </p:spTree>
+  </p:cSld>
+  <p:clrMapOvr>
+    <a:masterClrMapping/>
+  </p:clrMapOvr>
+</p:notes>
+</file>
+
+<file path=ppt/notesSlides/notesSlide8.xml><?xml version="1.0" encoding="utf-8"?>
+<p:notes xmlns:a="http://schemas.openxmlformats.org/drawingml/2006/main" xmlns:p="http://schemas.openxmlformats.org/presentationml/2006/main" xmlns:r="http://schemas.openxmlformats.org/officeDocument/2006/relationships">
+  <p:cSld>
+    <p:spTree>
+      <p:nvGrpSpPr>
+        <p:cNvPr id="1" name=""/>
+        <p:cNvGrpSpPr/>
+        <p:nvPr/>
+      </p:nvGrpSpPr>
+      <p:grpSpPr>
+        <a:xfrm>
+          <a:off x="0" y="0"/>
+          <a:ext cx="0" cy="0"/>
+          <a:chOff x="0" y="0"/>
+          <a:chExt cx="0" cy="0"/>
+        </a:xfrm>
+      </p:grpSpPr>
+      <p:sp>
+        <p:nvSpPr>
+          <p:cNvPr id="2" name="Slide Image Placeholder 1"/>
+          <p:cNvSpPr>
+            <a:spLocks noGrp="1"/>
+          </p:cNvSpPr>
+          <p:nvPr>
+            <p:ph type="sldImg" idx="2"/>
+          </p:nvPr>
+        </p:nvSpPr>
+        <p:spPr/>
+      </p:sp>
+      <p:sp>
+        <p:nvSpPr>
+          <p:cNvPr id="3" name="Notes Placeholder 2"/>
+          <p:cNvSpPr>
+            <a:spLocks noGrp="1"/>
+          </p:cNvSpPr>
+          <p:nvPr>
+            <p:ph type="body" idx="3" sz="quarter"/>
+          </p:nvPr>
+        </p:nvSpPr>
+        <p:spPr/>
+        <p:txBody>
+          <a:bodyPr/>
+          <a:lstStyle/>
+          <a:p>
+            <a:r>
+              <a:t>我的核心理念是八个字：专家是大脑，AI是双手。</a:t>
+            </a:r>
+          </a:p>
+          <a:p>
+            <a:r>
+              <a:t>作为专家，我提供三样东西：架构设计能力——定方向、定边界、定标准；业务理解深度——TDSQL的每一个细节我门儿清；质量判断标准——什么叫生产级可用，我说了算。</a:t>
+            </a:r>
+          </a:p>
+          <a:p>
+            <a:r>
+              <a:t>AI提供另外三样：万行级代码的落地执行、小时级的迭代速度、设计编码测试多角色并行的协同能力。</a:t>
+            </a:r>
+          </a:p>
+          <a:p>
+            <a:r>
+              <a:t>一句话：专家提供方向和质量标准，AI提供执行力和生产效率。我不是在和AI聊天，我是在管理一个AI团队——就像Tech Lead管理开发团队一样。</a:t>
+            </a:r>
+          </a:p>
+        </p:txBody>
+      </p:sp>
+      <p:sp>
+        <p:nvSpPr>
+          <p:cNvPr id="4" name="Slide Number Placeholder 3"/>
+          <p:cNvSpPr>
+            <a:spLocks noGrp="1"/>
+          </p:cNvSpPr>
+          <p:nvPr>
+            <p:ph type="sldNum" idx="5" sz="quarter"/>
+          </p:nvPr>
+        </p:nvSpPr>
+        <p:spPr/>
+      </p:sp>
+    </p:spTree>
+  </p:cSld>
+  <p:clrMapOvr>
+    <a:masterClrMapping/>
+  </p:clrMapOvr>
+</p:notes>
+</file>
+
+<file path=ppt/notesSlides/notesSlide9.xml><?xml version="1.0" encoding="utf-8"?>
+<p:notes xmlns:a="http://schemas.openxmlformats.org/drawingml/2006/main" xmlns:p="http://schemas.openxmlformats.org/presentationml/2006/main" xmlns:r="http://schemas.openxmlformats.org/officeDocument/2006/relationships">
+  <p:cSld>
+    <p:spTree>
+      <p:nvGrpSpPr>
+        <p:cNvPr id="1" name=""/>
+        <p:cNvGrpSpPr/>
+        <p:nvPr/>
+      </p:nvGrpSpPr>
+      <p:grpSpPr>
+        <a:xfrm>
+          <a:off x="0" y="0"/>
+          <a:ext cx="0" cy="0"/>
+          <a:chOff x="0" y="0"/>
+          <a:chExt cx="0" cy="0"/>
+        </a:xfrm>
+      </p:grpSpPr>
+      <p:sp>
+        <p:nvSpPr>
+          <p:cNvPr id="2" name="Slide Image Placeholder 1"/>
+          <p:cNvSpPr>
+            <a:spLocks noGrp="1"/>
+          </p:cNvSpPr>
+          <p:nvPr>
+            <p:ph type="sldImg" idx="2"/>
+          </p:nvPr>
+        </p:nvSpPr>
+        <p:spPr/>
+      </p:sp>
+      <p:sp>
+        <p:nvSpPr>
+          <p:cNvPr id="3" name="Notes Placeholder 2"/>
+          <p:cNvSpPr>
+            <a:spLocks noGrp="1"/>
+          </p:cNvSpPr>
+          <p:nvPr>
+            <p:ph type="body" idx="3" sz="quarter"/>
+          </p:nvPr>
+        </p:nvSpPr>
+        <p:spPr/>
+        <p:txBody>
+          <a:bodyPr/>
+          <a:lstStyle/>
+          <a:p>
+            <a:r>
+              <a:t>具体怎么管？我同时指挥三个AI智能体，各司其职。</a:t>
+            </a:r>
+          </a:p>
+          <a:p>
+            <a:r>
+              <a:t>设计智能体，是我的设计参谋，负责需求分析、架构设计、写设计说明书，还兼任质检验收；编码智能体，是我的程序员，严格按设计说明书写代码、修缺陷；测试智能体，是我的QA工程师，独立做SIT、UAT测试，专门挑毛病。</a:t>
+            </a:r>
+          </a:p>
+          <a:p>
+            <a:r>
+              <a:t>为什么必须三个角色？因为单一AI既当运动员又当裁判，必然失控。设计出标准、编码去实现、测试来揭短，我做最终裁决——制衡，才能产生质量。这是我在整个项目里最重要的一条管理心得。</a:t>
+            </a:r>
+          </a:p>
+        </p:txBody>
+      </p:sp>
+      <p:sp>
+        <p:nvSpPr>
+          <p:cNvPr id="4" name="Slide Number Placeholder 3"/>
+          <p:cNvSpPr>
+            <a:spLocks noGrp="1"/>
+          </p:cNvSpPr>
+          <p:nvPr>
+            <p:ph type="sldNum" idx="5" sz="quarter"/>
+          </p:nvPr>
+        </p:nvSpPr>
+        <p:spPr/>
+      </p:sp>
+    </p:spTree>
+  </p:cSld>
+  <p:clrMapOvr>
+    <a:masterClrMapping/>
+  </p:clrMapOvr>
+</p:notes>
 </file>
 
 <file path=ppt/slideLayouts/slideLayout1.xml><?xml version="1.0" encoding="utf-8"?>
@@ -40280,4 +43235,324 @@
   </a:objectDefaults>
   <a:extraClrSchemeLst/>
 </a:theme>
+</file>
+
+<file path=ppt/theme/theme2.xml><?xml version="1.0" encoding="utf-8"?>
+<a:theme xmlns:a="http://schemas.openxmlformats.org/drawingml/2006/main" name="Office Theme">
+  <a:themeElements>
+    <a:clrScheme name="Office">
+      <a:dk1>
+        <a:sysClr val="windowText" lastClr="000000"/>
+      </a:dk1>
+      <a:lt1>
+        <a:sysClr val="window" lastClr="FFFFFF"/>
+      </a:lt1>
+      <a:dk2>
+        <a:srgbClr val="1F497D"/>
+      </a:dk2>
+      <a:lt2>
+        <a:srgbClr val="EEECE1"/>
+      </a:lt2>
+      <a:accent1>
+        <a:srgbClr val="4F81BD"/>
+      </a:accent1>
+      <a:accent2>
+        <a:srgbClr val="C0504D"/>
+      </a:accent2>
+      <a:accent3>
+        <a:srgbClr val="9BBB59"/>
+      </a:accent3>
+      <a:accent4>
+        <a:srgbClr val="8064A2"/>
+      </a:accent4>
+      <a:accent5>
+        <a:srgbClr val="4BACC6"/>
+      </a:accent5>
+      <a:accent6>
+        <a:srgbClr val="F79646"/>
+      </a:accent6>
+      <a:hlink>
+        <a:srgbClr val="0000FF"/>
+      </a:hlink>
+      <a:folHlink>
+        <a:srgbClr val="800080"/>
+      </a:folHlink>
+    </a:clrScheme>
+    <a:fontScheme name="Office">
+      <a:majorFont>
+        <a:latin typeface="Calibri"/>
+        <a:ea typeface=""/>
+        <a:cs typeface=""/>
+        <a:font script="Jpan" typeface="ＭＳ Ｐゴシック"/>
+        <a:font script="Hang" typeface="맑은 고딕"/>
+        <a:font script="Hans" typeface="宋体"/>
+        <a:font script="Hant" typeface="新細明體"/>
+        <a:font script="Arab" typeface="Times New Roman"/>
+        <a:font script="Hebr" typeface="Times New Roman"/>
+        <a:font script="Thai" typeface="Angsana New"/>
+        <a:font script="Ethi" typeface="Nyala"/>
+        <a:font script="Beng" typeface="Vrinda"/>
+        <a:font script="Gujr" typeface="Shruti"/>
+        <a:font script="Khmr" typeface="MoolBoran"/>
+        <a:font script="Knda" typeface="Tunga"/>
+        <a:font script="Guru" typeface="Raavi"/>
+        <a:font script="Cans" typeface="Euphemia"/>
+        <a:font script="Cher" typeface="Plantagenet Cherokee"/>
+        <a:font script="Yiii" typeface="Microsoft Yi Baiti"/>
+        <a:font script="Tibt" typeface="Microsoft Himalaya"/>
+        <a:font script="Thaa" typeface="MV Boli"/>
+        <a:font script="Deva" typeface="Mangal"/>
+        <a:font script="Telu" typeface="Gautami"/>
+        <a:font script="Taml" typeface="Latha"/>
+        <a:font script="Syrc" typeface="Estrangelo Edessa"/>
+        <a:font script="Orya" typeface="Kalinga"/>
+        <a:font script="Mlym" typeface="Kartika"/>
+        <a:font script="Laoo" typeface="DokChampa"/>
+        <a:font script="Sinh" typeface="Iskoola Pota"/>
+        <a:font script="Mong" typeface="Mongolian Baiti"/>
+        <a:font script="Viet" typeface="Times New Roman"/>
+        <a:font script="Uigh" typeface="Microsoft Uighur"/>
+        <a:font script="Geor" typeface="Sylfaen"/>
+      </a:majorFont>
+      <a:minorFont>
+        <a:latin typeface="Calibri"/>
+        <a:ea typeface=""/>
+        <a:cs typeface=""/>
+        <a:font script="Jpan" typeface="ＭＳ Ｐゴシック"/>
+        <a:font script="Hang" typeface="맑은 고딕"/>
+        <a:font script="Hans" typeface="宋体"/>
+        <a:font script="Hant" typeface="新細明體"/>
+        <a:font script="Arab" typeface="Arial"/>
+        <a:font script="Hebr" typeface="Arial"/>
+        <a:font script="Thai" typeface="Cordia New"/>
+        <a:font script="Ethi" typeface="Nyala"/>
+        <a:font script="Beng" typeface="Vrinda"/>
+        <a:font script="Gujr" typeface="Shruti"/>
+        <a:font script="Khmr" typeface="DaunPenh"/>
+        <a:font script="Knda" typeface="Tunga"/>
+        <a:font script="Guru" typeface="Raavi"/>
+        <a:font script="Cans" typeface="Euphemia"/>
+        <a:font script="Cher" typeface="Plantagenet Cherokee"/>
+        <a:font script="Yiii" typeface="Microsoft Yi Baiti"/>
+        <a:font script="Tibt" typeface="Microsoft Himalaya"/>
+        <a:font script="Thaa" typeface="MV Boli"/>
+        <a:font script="Deva" typeface="Mangal"/>
+        <a:font script="Telu" typeface="Gautami"/>
+        <a:font script="Taml" typeface="Latha"/>
+        <a:font script="Syrc" typeface="Estrangelo Edessa"/>
+        <a:font script="Orya" typeface="Kalinga"/>
+        <a:font script="Mlym" typeface="Kartika"/>
+        <a:font script="Laoo" typeface="DokChampa"/>
+        <a:font script="Sinh" typeface="Iskoola Pota"/>
+        <a:font script="Mong" typeface="Mongolian Baiti"/>
+        <a:font script="Viet" typeface="Arial"/>
+        <a:font script="Uigh" typeface="Microsoft Uighur"/>
+        <a:font script="Geor" typeface="Sylfaen"/>
+      </a:minorFont>
+    </a:fontScheme>
+    <a:fmtScheme name="Office">
+      <a:fillStyleLst>
+        <a:solidFill>
+          <a:schemeClr val="phClr"/>
+        </a:solidFill>
+        <a:gradFill rotWithShape="1">
+          <a:gsLst>
+            <a:gs pos="0">
+              <a:schemeClr val="phClr">
+                <a:tint val="50000"/>
+                <a:satMod val="300000"/>
+              </a:schemeClr>
+            </a:gs>
+            <a:gs pos="35000">
+              <a:schemeClr val="phClr">
+                <a:tint val="37000"/>
+                <a:satMod val="300000"/>
+              </a:schemeClr>
+            </a:gs>
+            <a:gs pos="100000">
+              <a:schemeClr val="phClr">
+                <a:tint val="15000"/>
+                <a:satMod val="350000"/>
+              </a:schemeClr>
+            </a:gs>
+          </a:gsLst>
+          <a:lin ang="16200000" scaled="1"/>
+        </a:gradFill>
+        <a:gradFill rotWithShape="1">
+          <a:gsLst>
+            <a:gs pos="0">
+              <a:schemeClr val="phClr">
+                <a:tint val="100000"/>
+                <a:shade val="100000"/>
+                <a:satMod val="130000"/>
+              </a:schemeClr>
+            </a:gs>
+            <a:gs pos="100000">
+              <a:schemeClr val="phClr">
+                <a:tint val="50000"/>
+                <a:shade val="100000"/>
+                <a:satMod val="350000"/>
+              </a:schemeClr>
+            </a:gs>
+          </a:gsLst>
+          <a:lin ang="16200000" scaled="0"/>
+        </a:gradFill>
+      </a:fillStyleLst>
+      <a:lnStyleLst>
+        <a:ln w="9525" cap="flat" cmpd="sng" algn="ctr">
+          <a:solidFill>
+            <a:schemeClr val="phClr">
+              <a:shade val="95000"/>
+              <a:satMod val="105000"/>
+            </a:schemeClr>
+          </a:solidFill>
+          <a:prstDash val="solid"/>
+        </a:ln>
+        <a:ln w="25400" cap="flat" cmpd="sng" algn="ctr">
+          <a:solidFill>
+            <a:schemeClr val="phClr"/>
+          </a:solidFill>
+          <a:prstDash val="solid"/>
+        </a:ln>
+        <a:ln w="38100" cap="flat" cmpd="sng" algn="ctr">
+          <a:solidFill>
+            <a:schemeClr val="phClr"/>
+          </a:solidFill>
+          <a:prstDash val="solid"/>
+        </a:ln>
+      </a:lnStyleLst>
+      <a:effectStyleLst>
+        <a:effectStyle>
+          <a:effectLst>
+            <a:outerShdw blurRad="40000" dist="20000" dir="5400000" rotWithShape="0">
+              <a:srgbClr val="000000">
+                <a:alpha val="38000"/>
+              </a:srgbClr>
+            </a:outerShdw>
+          </a:effectLst>
+        </a:effectStyle>
+        <a:effectStyle>
+          <a:effectLst>
+            <a:outerShdw blurRad="40000" dist="23000" dir="5400000" rotWithShape="0">
+              <a:srgbClr val="000000">
+                <a:alpha val="35000"/>
+              </a:srgbClr>
+            </a:outerShdw>
+          </a:effectLst>
+        </a:effectStyle>
+        <a:effectStyle>
+          <a:effectLst>
+            <a:outerShdw blurRad="40000" dist="23000" dir="5400000" rotWithShape="0">
+              <a:srgbClr val="000000">
+                <a:alpha val="35000"/>
+              </a:srgbClr>
+            </a:outerShdw>
+          </a:effectLst>
+          <a:scene3d>
+            <a:camera prst="orthographicFront">
+              <a:rot lat="0" lon="0" rev="0"/>
+            </a:camera>
+            <a:lightRig rig="threePt" dir="t">
+              <a:rot lat="0" lon="0" rev="1200000"/>
+            </a:lightRig>
+          </a:scene3d>
+          <a:sp3d>
+            <a:bevelT w="63500" h="25400"/>
+          </a:sp3d>
+        </a:effectStyle>
+      </a:effectStyleLst>
+      <a:bgFillStyleLst>
+        <a:solidFill>
+          <a:schemeClr val="phClr"/>
+        </a:solidFill>
+        <a:gradFill rotWithShape="1">
+          <a:gsLst>
+            <a:gs pos="0">
+              <a:schemeClr val="phClr">
+                <a:tint val="40000"/>
+                <a:satMod val="350000"/>
+              </a:schemeClr>
+            </a:gs>
+            <a:gs pos="40000">
+              <a:schemeClr val="phClr">
+                <a:tint val="45000"/>
+                <a:shade val="99000"/>
+                <a:satMod val="350000"/>
+              </a:schemeClr>
+            </a:gs>
+            <a:gs pos="100000">
+              <a:schemeClr val="phClr">
+                <a:shade val="20000"/>
+                <a:satMod val="255000"/>
+              </a:schemeClr>
+            </a:gs>
+          </a:gsLst>
+          <a:path path="circle">
+            <a:fillToRect l="50000" t="-80000" r="50000" b="180000"/>
+          </a:path>
+        </a:gradFill>
+        <a:gradFill rotWithShape="1">
+          <a:gsLst>
+            <a:gs pos="0">
+              <a:schemeClr val="phClr">
+                <a:tint val="80000"/>
+                <a:satMod val="300000"/>
+              </a:schemeClr>
+            </a:gs>
+            <a:gs pos="100000">
+              <a:schemeClr val="phClr">
+                <a:shade val="30000"/>
+                <a:satMod val="200000"/>
+              </a:schemeClr>
+            </a:gs>
+          </a:gsLst>
+          <a:path path="circle">
+            <a:fillToRect l="50000" t="50000" r="50000" b="50000"/>
+          </a:path>
+        </a:gradFill>
+      </a:bgFillStyleLst>
+    </a:fmtScheme>
+  </a:themeElements>
+  <a:objectDefaults>
+    <a:spDef>
+      <a:spPr/>
+      <a:bodyPr/>
+      <a:lstStyle/>
+      <a:style>
+        <a:lnRef idx="1">
+          <a:schemeClr val="accent1"/>
+        </a:lnRef>
+        <a:fillRef idx="3">
+          <a:schemeClr val="accent1"/>
+        </a:fillRef>
+        <a:effectRef idx="2">
+          <a:schemeClr val="accent1"/>
+        </a:effectRef>
+        <a:fontRef idx="minor">
+          <a:schemeClr val="lt1"/>
+        </a:fontRef>
+      </a:style>
+    </a:spDef>
+    <a:lnDef>
+      <a:spPr/>
+      <a:bodyPr/>
+      <a:lstStyle/>
+      <a:style>
+        <a:lnRef idx="2">
+          <a:schemeClr val="accent1"/>
+        </a:lnRef>
+        <a:fillRef idx="0">
+          <a:schemeClr val="accent1"/>
+        </a:fillRef>
+        <a:effectRef idx="1">
+          <a:schemeClr val="accent1"/>
+        </a:effectRef>
+        <a:fontRef idx="minor">
+          <a:schemeClr val="tx1"/>
+        </a:fontRef>
+      </a:style>
+    </a:lnDef>
+  </a:objectDefaults>
+  <a:extraClrSchemeLst/>
+</a:theme>
 </file>
--- a/docs/AI赋能DBA创新实践汇报PPT.pptx
+++ b/docs/AI赋能DBA创新实践汇报PPT.pptx
@@ -2824,17 +2824,17 @@
           <a:lstStyle/>
           <a:p>
             <a:r>
-              <a:t>AI给了我一个破局的机会。我当时的想法很朴素：我懂TDSQL的每一个技术细节和运维规范，我能设计出完整的审核规则体系和架构方案——我缺的只是把设计变成代码的那双手。而AI，恰恰就是这双手。</a:t>
-            </a:r>
-          </a:p>
-          <a:p>
-            <a:r>
-              <a:t>于是我做了一个大胆的假设：一个人，加上AI工具，能不能等于一个完整的生产力团队？</a:t>
-            </a:r>
-          </a:p>
-          <a:p>
-            <a:r>
-              <a:t>接下来的八周，验证了这个假设。</a:t>
+              <a:t>转机来自王总的一次推荐。王总让我读了《金融电子化》杂志上的一篇文章——《北京农商银行SQL审核平台建设与运维实践》。读完很受触动：同业已经用SQL审核平台把我们头疼的这些问题解决了，价值是被验证过的，思路是有迹可循的。</a:t>
+            </a:r>
+          </a:p>
+          <a:p>
+            <a:r>
+              <a:t>但北京农商有开发团队，我们没有——这时候我想到了AI。我的构想很朴素：给AI两份"养料"，第一份，把这篇同业文章交给AI，让它分析北京农商的平台设计思路；第二份，把TDSQL官方的审核规则交给AI，作为规则体系的底座。在这两份输入之上，让AI协助我们开发一套属于自己的TDSQL数据库SQL审核工具。</a:t>
+            </a:r>
+          </a:p>
+          <a:p>
+            <a:r>
+              <a:t>于是就有了这个大胆的假设：我懂TDSQL和运维规范，AI有编程能力——一个人，加上AI工具，能不能等于一个完整的生产力团队？接下来的八周，验证了这个假设。</a:t>
             </a:r>
           </a:p>
         </p:txBody>
@@ -39160,7 +39160,7 @@
                 </a:solidFill>
                 <a:latin typeface="微软雅黑"/>
               </a:rPr>
-              <a:t>破局思路：一个大胆的假设</a:t>
+              <a:t>破局思路：一篇同业文章，点亮一个大胆的假设</a:t>
             </a:r>
           </a:p>
         </p:txBody>
@@ -39307,12 +39307,244 @@
         </p:nvSpPr>
         <p:spPr>
           <a:xfrm>
-            <a:off x="566928" y="1691640"/>
-            <a:ext cx="3200400" cy="1371600"/>
+            <a:off x="566928" y="1554480"/>
+            <a:ext cx="11057839" cy="1188720"/>
           </a:xfrm>
           <a:prstGeom prst="roundRect">
             <a:avLst>
-              <a:gd name="adj" fmla="val 10000"/>
+              <a:gd name="adj" fmla="val 8000"/>
+            </a:avLst>
+          </a:prstGeom>
+          <a:solidFill>
+            <a:srgbClr val="FBF3E1"/>
+          </a:solidFill>
+          <a:ln>
+            <a:noFill/>
+          </a:ln>
+          <a:effectLst/>
+        </p:spPr>
+        <p:style>
+          <a:lnRef idx="1">
+            <a:schemeClr val="accent1"/>
+          </a:lnRef>
+          <a:fillRef idx="3">
+            <a:schemeClr val="accent1"/>
+          </a:fillRef>
+          <a:effectRef idx="2">
+            <a:schemeClr val="accent1"/>
+          </a:effectRef>
+          <a:fontRef idx="minor">
+            <a:schemeClr val="lt1"/>
+          </a:fontRef>
+        </p:style>
+        <p:txBody>
+          <a:bodyPr rtlCol="0" anchor="ctr"/>
+          <a:lstStyle/>
+          <a:p>
+            <a:pPr algn="ctr"/>
+          </a:p>
+        </p:txBody>
+      </p:sp>
+      <p:sp>
+        <p:nvSpPr>
+          <p:cNvPr id="9" name="Rounded Rectangle 8"/>
+          <p:cNvSpPr/>
+          <p:nvPr/>
+        </p:nvSpPr>
+        <p:spPr>
+          <a:xfrm>
+            <a:off x="768096" y="1901952"/>
+            <a:ext cx="914400" cy="457200"/>
+          </a:xfrm>
+          <a:prstGeom prst="roundRect">
+            <a:avLst>
+              <a:gd name="adj" fmla="val 50000"/>
+            </a:avLst>
+          </a:prstGeom>
+          <a:solidFill>
+            <a:srgbClr val="E3A93C"/>
+          </a:solidFill>
+          <a:ln>
+            <a:noFill/>
+          </a:ln>
+          <a:effectLst/>
+        </p:spPr>
+        <p:style>
+          <a:lnRef idx="1">
+            <a:schemeClr val="accent1"/>
+          </a:lnRef>
+          <a:fillRef idx="3">
+            <a:schemeClr val="accent1"/>
+          </a:fillRef>
+          <a:effectRef idx="2">
+            <a:schemeClr val="accent1"/>
+          </a:effectRef>
+          <a:fontRef idx="minor">
+            <a:schemeClr val="lt1"/>
+          </a:fontRef>
+        </p:style>
+        <p:txBody>
+          <a:bodyPr rtlCol="0" anchor="ctr" wrap="square" lIns="50800" rIns="50800" tIns="12700" bIns="12700"/>
+          <a:lstStyle/>
+          <a:p>
+            <a:pPr algn="ctr">
+              <a:lnSpc>
+                <a:spcPct val="112000"/>
+              </a:lnSpc>
+              <a:spcBef>
+                <a:spcPts val="0"/>
+              </a:spcBef>
+              <a:spcAft>
+                <a:spcPts val="0"/>
+              </a:spcAft>
+            </a:pPr>
+            <a:r>
+              <a:rPr sz="1250" b="1">
+                <a:solidFill>
+                  <a:srgbClr val="FFFFFF"/>
+                </a:solidFill>
+                <a:latin typeface="微软雅黑"/>
+              </a:rPr>
+              <a:t>契 机</a:t>
+            </a:r>
+          </a:p>
+        </p:txBody>
+      </p:sp>
+      <p:sp>
+        <p:nvSpPr>
+          <p:cNvPr id="10" name="TextBox 9"/>
+          <p:cNvSpPr txBox="1"/>
+          <p:nvPr/>
+        </p:nvSpPr>
+        <p:spPr>
+          <a:xfrm>
+            <a:off x="1938528" y="1664208"/>
+            <a:ext cx="9966960" cy="969264"/>
+          </a:xfrm>
+          <a:prstGeom prst="rect">
+            <a:avLst/>
+          </a:prstGeom>
+          <a:noFill/>
+        </p:spPr>
+        <p:txBody>
+          <a:bodyPr wrap="square" anchor="ctr">
+            <a:spAutoFit/>
+          </a:bodyPr>
+          <a:lstStyle/>
+          <a:p>
+            <a:pPr algn="l">
+              <a:lnSpc>
+                <a:spcPct val="135000"/>
+              </a:lnSpc>
+              <a:spcBef>
+                <a:spcPts val="0"/>
+              </a:spcBef>
+              <a:spcAft>
+                <a:spcPts val="0"/>
+              </a:spcAft>
+            </a:pPr>
+            <a:r>
+              <a:rPr sz="1350" b="0">
+                <a:solidFill>
+                  <a:srgbClr val="1C2B3A"/>
+                </a:solidFill>
+                <a:latin typeface="微软雅黑"/>
+              </a:rPr>
+              <a:t>王总向我推荐了《金融电子化》刊载的</a:t>
+            </a:r>
+            <a:r>
+              <a:rPr sz="1350" b="1">
+                <a:solidFill>
+                  <a:srgbClr val="0E2239"/>
+                </a:solidFill>
+                <a:latin typeface="微软雅黑"/>
+              </a:rPr>
+              <a:t>《北京农商银行SQL审核平台建设与运维实践》</a:t>
+            </a:r>
+          </a:p>
+          <a:p>
+            <a:pPr algn="l">
+              <a:lnSpc>
+                <a:spcPct val="130000"/>
+              </a:lnSpc>
+              <a:spcBef>
+                <a:spcPts val="500"/>
+              </a:spcBef>
+              <a:spcAft>
+                <a:spcPts val="0"/>
+              </a:spcAft>
+            </a:pPr>
+            <a:r>
+              <a:rPr sz="1250" b="0">
+                <a:solidFill>
+                  <a:srgbClr val="64778C"/>
+                </a:solidFill>
+                <a:latin typeface="微软雅黑"/>
+              </a:rPr>
+              <a:t>同业已经用 SQL 审核平台解决了同样的痛点——价值已被验证，思路有迹可循。</a:t>
+            </a:r>
+          </a:p>
+        </p:txBody>
+      </p:sp>
+      <p:sp>
+        <p:nvSpPr>
+          <p:cNvPr id="11" name="TextBox 10"/>
+          <p:cNvSpPr txBox="1"/>
+          <p:nvPr/>
+        </p:nvSpPr>
+        <p:spPr>
+          <a:xfrm>
+            <a:off x="566928" y="2944368"/>
+            <a:ext cx="10881360" cy="365760"/>
+          </a:xfrm>
+          <a:prstGeom prst="rect">
+            <a:avLst/>
+          </a:prstGeom>
+          <a:noFill/>
+        </p:spPr>
+        <p:txBody>
+          <a:bodyPr wrap="square">
+            <a:spAutoFit/>
+          </a:bodyPr>
+          <a:lstStyle/>
+          <a:p>
+            <a:pPr algn="l">
+              <a:lnSpc>
+                <a:spcPct val="112000"/>
+              </a:lnSpc>
+              <a:spcBef>
+                <a:spcPts val="0"/>
+              </a:spcBef>
+              <a:spcAft>
+                <a:spcPts val="0"/>
+              </a:spcAft>
+            </a:pPr>
+            <a:r>
+              <a:rPr sz="1350" b="1">
+                <a:solidFill>
+                  <a:srgbClr val="0E2239"/>
+                </a:solidFill>
+                <a:latin typeface="微软雅黑"/>
+              </a:rPr>
+              <a:t>由此产生的构想：给 AI 两份「养料」，让它协助我们开发自己的工具</a:t>
+            </a:r>
+          </a:p>
+        </p:txBody>
+      </p:sp>
+      <p:sp>
+        <p:nvSpPr>
+          <p:cNvPr id="12" name="Rounded Rectangle 11"/>
+          <p:cNvSpPr/>
+          <p:nvPr/>
+        </p:nvSpPr>
+        <p:spPr>
+          <a:xfrm>
+            <a:off x="566928" y="3383280"/>
+            <a:ext cx="3401568" cy="1600200"/>
+          </a:xfrm>
+          <a:prstGeom prst="roundRect">
+            <a:avLst>
+              <a:gd name="adj" fmla="val 9000"/>
             </a:avLst>
           </a:prstGeom>
           <a:solidFill>
@@ -39338,7 +39570,7 @@
           </a:fontRef>
         </p:style>
         <p:txBody>
-          <a:bodyPr rtlCol="0" anchor="ctr" wrap="square" lIns="127000" rIns="127000" tIns="88900" bIns="88900"/>
+          <a:bodyPr rtlCol="0" anchor="ctr" wrap="square" lIns="139700" rIns="139700" tIns="97789" bIns="97789"/>
           <a:lstStyle/>
           <a:p>
             <a:pPr algn="ctr">
@@ -39353,49 +39585,50 @@
               </a:spcAft>
             </a:pPr>
             <a:r>
-              <a:rPr sz="1800" b="1">
+              <a:rPr sz="1350" b="1">
                 <a:solidFill>
                   <a:srgbClr val="2B7BD3"/>
                 </a:solidFill>
                 <a:latin typeface="微软雅黑"/>
               </a:rPr>
-              <a:t>DBA 的专家经验</a:t>
+              <a:t>输入① 同业实践</a:t>
             </a:r>
           </a:p>
           <a:p>
             <a:pPr algn="ctr">
               <a:lnSpc>
-                <a:spcPct val="112000"/>
-              </a:lnSpc>
-              <a:spcBef>
-                <a:spcPts val="500"/>
-              </a:spcBef>
-              <a:spcAft>
-                <a:spcPts val="0"/>
-              </a:spcAft>
-            </a:pPr>
-            <a:r>
-              <a:rPr sz="1100" b="0">
-                <a:solidFill>
-                  <a:srgbClr val="64778C"/>
-                </a:solidFill>
-                <a:latin typeface="微软雅黑"/>
-              </a:rPr>
-              <a:t>TDSQL 技术细节 · 运维规范 · 规则体系</a:t>
-            </a:r>
-          </a:p>
-        </p:txBody>
-      </p:sp>
-      <p:sp>
-        <p:nvSpPr>
-          <p:cNvPr id="9" name="TextBox 8"/>
+                <a:spcPct val="130000"/>
+              </a:lnSpc>
+              <a:spcBef>
+                <a:spcPts val="700"/>
+              </a:spcBef>
+              <a:spcAft>
+                <a:spcPts val="0"/>
+              </a:spcAft>
+            </a:pPr>
+            <a:r>
+              <a:rPr sz="1150" b="0">
+                <a:solidFill>
+                  <a:srgbClr val="1C2B3A"/>
+                </a:solidFill>
+                <a:latin typeface="微软雅黑"/>
+              </a:rPr>
+              <a:t>把这篇文章交给 AI
+分析北京农商的平台设计思路</a:t>
+            </a:r>
+          </a:p>
+        </p:txBody>
+      </p:sp>
+      <p:sp>
+        <p:nvSpPr>
+          <p:cNvPr id="13" name="TextBox 12"/>
           <p:cNvSpPr txBox="1"/>
           <p:nvPr/>
         </p:nvSpPr>
         <p:spPr>
           <a:xfrm>
-            <a:off x="3877056" y="1965960"/>
-            <a:ext cx="640080" cy="822960"/>
+            <a:off x="4005072" y="3886200"/>
+            <a:ext cx="457200" cy="548640"/>
           </a:xfrm>
           <a:prstGeom prst="rect">
             <a:avLst/>
@@ -39420,7 +39653,7 @@
               </a:spcAft>
             </a:pPr>
             <a:r>
-              <a:rPr sz="4000" b="1">
+              <a:rPr sz="2600" b="1">
                 <a:solidFill>
                   <a:srgbClr val="64778C"/>
                 </a:solidFill>
@@ -39433,18 +39666,239 @@
       </p:sp>
       <p:sp>
         <p:nvSpPr>
-          <p:cNvPr id="10" name="Rounded Rectangle 9"/>
+          <p:cNvPr id="14" name="Rounded Rectangle 13"/>
           <p:cNvSpPr/>
           <p:nvPr/>
         </p:nvSpPr>
         <p:spPr>
           <a:xfrm>
-            <a:off x="4590288" y="1691640"/>
-            <a:ext cx="3200400" cy="1371600"/>
+            <a:off x="4498848" y="3383280"/>
+            <a:ext cx="3401568" cy="1600200"/>
           </a:xfrm>
           <a:prstGeom prst="roundRect">
             <a:avLst>
-              <a:gd name="adj" fmla="val 10000"/>
+              <a:gd name="adj" fmla="val 9000"/>
+            </a:avLst>
+          </a:prstGeom>
+          <a:solidFill>
+            <a:srgbClr val="E4EFFA"/>
+          </a:solidFill>
+          <a:ln>
+            <a:noFill/>
+          </a:ln>
+          <a:effectLst/>
+        </p:spPr>
+        <p:style>
+          <a:lnRef idx="1">
+            <a:schemeClr val="accent1"/>
+          </a:lnRef>
+          <a:fillRef idx="3">
+            <a:schemeClr val="accent1"/>
+          </a:fillRef>
+          <a:effectRef idx="2">
+            <a:schemeClr val="accent1"/>
+          </a:effectRef>
+          <a:fontRef idx="minor">
+            <a:schemeClr val="lt1"/>
+          </a:fontRef>
+        </p:style>
+        <p:txBody>
+          <a:bodyPr rtlCol="0" anchor="ctr" wrap="square" lIns="139700" rIns="139700" tIns="97789" bIns="97789"/>
+          <a:lstStyle/>
+          <a:p>
+            <a:pPr algn="ctr">
+              <a:lnSpc>
+                <a:spcPct val="112000"/>
+              </a:lnSpc>
+              <a:spcBef>
+                <a:spcPts val="0"/>
+              </a:spcBef>
+              <a:spcAft>
+                <a:spcPts val="0"/>
+              </a:spcAft>
+            </a:pPr>
+            <a:r>
+              <a:rPr sz="1350" b="1">
+                <a:solidFill>
+                  <a:srgbClr val="2B7BD3"/>
+                </a:solidFill>
+                <a:latin typeface="微软雅黑"/>
+              </a:rPr>
+              <a:t>输入② 官方规范</a:t>
+            </a:r>
+          </a:p>
+          <a:p>
+            <a:pPr algn="ctr">
+              <a:lnSpc>
+                <a:spcPct val="130000"/>
+              </a:lnSpc>
+              <a:spcBef>
+                <a:spcPts val="700"/>
+              </a:spcBef>
+              <a:spcAft>
+                <a:spcPts val="0"/>
+              </a:spcAft>
+            </a:pPr>
+            <a:r>
+              <a:rPr sz="1150" b="0">
+                <a:solidFill>
+                  <a:srgbClr val="1C2B3A"/>
+                </a:solidFill>
+                <a:latin typeface="微软雅黑"/>
+              </a:rPr>
+              <a:t>把 TDSQL 官方审核规则交给 AI
+作为规则体系的底座</a:t>
+            </a:r>
+          </a:p>
+        </p:txBody>
+      </p:sp>
+      <p:sp>
+        <p:nvSpPr>
+          <p:cNvPr id="15" name="TextBox 14"/>
+          <p:cNvSpPr txBox="1"/>
+          <p:nvPr/>
+        </p:nvSpPr>
+        <p:spPr>
+          <a:xfrm>
+            <a:off x="7936992" y="3886200"/>
+            <a:ext cx="457200" cy="548640"/>
+          </a:xfrm>
+          <a:prstGeom prst="rect">
+            <a:avLst/>
+          </a:prstGeom>
+          <a:noFill/>
+        </p:spPr>
+        <p:txBody>
+          <a:bodyPr wrap="square">
+            <a:spAutoFit/>
+          </a:bodyPr>
+          <a:lstStyle/>
+          <a:p>
+            <a:pPr algn="ctr">
+              <a:lnSpc>
+                <a:spcPct val="112000"/>
+              </a:lnSpc>
+              <a:spcBef>
+                <a:spcPts val="0"/>
+              </a:spcBef>
+              <a:spcAft>
+                <a:spcPts val="0"/>
+              </a:spcAft>
+            </a:pPr>
+            <a:r>
+              <a:rPr sz="2600" b="1">
+                <a:solidFill>
+                  <a:srgbClr val="E3A93C"/>
+                </a:solidFill>
+                <a:latin typeface="微软雅黑"/>
+              </a:rPr>
+              <a:t>→</a:t>
+            </a:r>
+          </a:p>
+        </p:txBody>
+      </p:sp>
+      <p:sp>
+        <p:nvSpPr>
+          <p:cNvPr id="16" name="Rounded Rectangle 15"/>
+          <p:cNvSpPr/>
+          <p:nvPr/>
+        </p:nvSpPr>
+        <p:spPr>
+          <a:xfrm>
+            <a:off x="8430768" y="3383280"/>
+            <a:ext cx="3566160" cy="1600200"/>
+          </a:xfrm>
+          <a:prstGeom prst="roundRect">
+            <a:avLst>
+              <a:gd name="adj" fmla="val 9000"/>
+            </a:avLst>
+          </a:prstGeom>
+          <a:solidFill>
+            <a:srgbClr val="0E2239"/>
+          </a:solidFill>
+          <a:ln>
+            <a:noFill/>
+          </a:ln>
+          <a:effectLst/>
+        </p:spPr>
+        <p:style>
+          <a:lnRef idx="1">
+            <a:schemeClr val="accent1"/>
+          </a:lnRef>
+          <a:fillRef idx="3">
+            <a:schemeClr val="accent1"/>
+          </a:fillRef>
+          <a:effectRef idx="2">
+            <a:schemeClr val="accent1"/>
+          </a:effectRef>
+          <a:fontRef idx="minor">
+            <a:schemeClr val="lt1"/>
+          </a:fontRef>
+        </p:style>
+        <p:txBody>
+          <a:bodyPr rtlCol="0" anchor="ctr" wrap="square" lIns="139700" rIns="139700" tIns="97789" bIns="97789"/>
+          <a:lstStyle/>
+          <a:p>
+            <a:pPr algn="ctr">
+              <a:lnSpc>
+                <a:spcPct val="112000"/>
+              </a:lnSpc>
+              <a:spcBef>
+                <a:spcPts val="0"/>
+              </a:spcBef>
+              <a:spcAft>
+                <a:spcPts val="0"/>
+              </a:spcAft>
+            </a:pPr>
+            <a:r>
+              <a:rPr sz="1350" b="1">
+                <a:solidFill>
+                  <a:srgbClr val="E3A93C"/>
+                </a:solidFill>
+                <a:latin typeface="微软雅黑"/>
+              </a:rPr>
+              <a:t>产出：AI 协助开发</a:t>
+            </a:r>
+          </a:p>
+          <a:p>
+            <a:pPr algn="ctr">
+              <a:lnSpc>
+                <a:spcPct val="135000"/>
+              </a:lnSpc>
+              <a:spcBef>
+                <a:spcPts val="700"/>
+              </a:spcBef>
+              <a:spcAft>
+                <a:spcPts val="0"/>
+              </a:spcAft>
+            </a:pPr>
+            <a:r>
+              <a:rPr sz="1200" b="1">
+                <a:solidFill>
+                  <a:srgbClr val="FFFFFF"/>
+                </a:solidFill>
+                <a:latin typeface="微软雅黑"/>
+              </a:rPr>
+              <a:t>一套属于我们自己的
+TDSQL 数据库 SQL 审核工具</a:t>
+            </a:r>
+          </a:p>
+        </p:txBody>
+      </p:sp>
+      <p:sp>
+        <p:nvSpPr>
+          <p:cNvPr id="17" name="Rounded Rectangle 16"/>
+          <p:cNvSpPr/>
+          <p:nvPr/>
+        </p:nvSpPr>
+        <p:spPr>
+          <a:xfrm>
+            <a:off x="566928" y="5440680"/>
+            <a:ext cx="11057839" cy="777240"/>
+          </a:xfrm>
+          <a:prstGeom prst="roundRect">
+            <a:avLst>
+              <a:gd name="adj" fmla="val 12000"/>
             </a:avLst>
           </a:prstGeom>
           <a:solidFill>
@@ -39485,687 +39939,22 @@
               </a:spcAft>
             </a:pPr>
             <a:r>
-              <a:rPr sz="1800" b="1">
+              <a:rPr sz="1550" b="1">
                 <a:solidFill>
                   <a:srgbClr val="E3A93C"/>
                 </a:solidFill>
                 <a:latin typeface="微软雅黑"/>
               </a:rPr>
-              <a:t>AI 的编程能力</a:t>
-            </a:r>
-          </a:p>
-          <a:p>
-            <a:pPr algn="ctr">
-              <a:lnSpc>
-                <a:spcPct val="112000"/>
-              </a:lnSpc>
-              <a:spcBef>
-                <a:spcPts val="500"/>
-              </a:spcBef>
-              <a:spcAft>
-                <a:spcPts val="0"/>
-              </a:spcAft>
-            </a:pPr>
-            <a:r>
-              <a:rPr sz="1100" b="0">
-                <a:solidFill>
-                  <a:srgbClr val="64778C"/>
-                </a:solidFill>
-                <a:latin typeface="微软雅黑"/>
-              </a:rPr>
-              <a:t>代码实现 · 快速迭代 · 多角色协同</a:t>
-            </a:r>
-          </a:p>
-        </p:txBody>
-      </p:sp>
-      <p:sp>
-        <p:nvSpPr>
-          <p:cNvPr id="11" name="TextBox 10"/>
-          <p:cNvSpPr txBox="1"/>
-          <p:nvPr/>
-        </p:nvSpPr>
-        <p:spPr>
-          <a:xfrm>
-            <a:off x="7900416" y="1965960"/>
-            <a:ext cx="640080" cy="822960"/>
-          </a:xfrm>
-          <a:prstGeom prst="rect">
-            <a:avLst/>
-          </a:prstGeom>
-          <a:noFill/>
-        </p:spPr>
-        <p:txBody>
-          <a:bodyPr wrap="square">
-            <a:spAutoFit/>
-          </a:bodyPr>
-          <a:lstStyle/>
-          <a:p>
-            <a:pPr algn="ctr">
-              <a:lnSpc>
-                <a:spcPct val="112000"/>
-              </a:lnSpc>
-              <a:spcBef>
-                <a:spcPts val="0"/>
-              </a:spcBef>
-              <a:spcAft>
-                <a:spcPts val="0"/>
-              </a:spcAft>
-            </a:pPr>
-            <a:r>
-              <a:rPr sz="4000" b="1">
-                <a:solidFill>
-                  <a:srgbClr val="64778C"/>
-                </a:solidFill>
-                <a:latin typeface="微软雅黑"/>
-              </a:rPr>
-              <a:t>=</a:t>
-            </a:r>
-          </a:p>
-        </p:txBody>
-      </p:sp>
-      <p:sp>
-        <p:nvSpPr>
-          <p:cNvPr id="12" name="Rounded Rectangle 11"/>
-          <p:cNvSpPr/>
-          <p:nvPr/>
-        </p:nvSpPr>
-        <p:spPr>
-          <a:xfrm>
-            <a:off x="8613648" y="1691640"/>
-            <a:ext cx="3291840" cy="1371600"/>
-          </a:xfrm>
-          <a:prstGeom prst="roundRect">
-            <a:avLst>
-              <a:gd name="adj" fmla="val 10000"/>
-            </a:avLst>
-          </a:prstGeom>
-          <a:solidFill>
-            <a:srgbClr val="0E2239"/>
-          </a:solidFill>
-          <a:ln>
-            <a:noFill/>
-          </a:ln>
-          <a:effectLst/>
-        </p:spPr>
-        <p:style>
-          <a:lnRef idx="1">
-            <a:schemeClr val="accent1"/>
-          </a:lnRef>
-          <a:fillRef idx="3">
-            <a:schemeClr val="accent1"/>
-          </a:fillRef>
-          <a:effectRef idx="2">
-            <a:schemeClr val="accent1"/>
-          </a:effectRef>
-          <a:fontRef idx="minor">
-            <a:schemeClr val="lt1"/>
-          </a:fontRef>
-        </p:style>
-        <p:txBody>
-          <a:bodyPr rtlCol="0" anchor="ctr" wrap="square" lIns="127000" rIns="127000" tIns="88900" bIns="88900"/>
-          <a:lstStyle/>
-          <a:p>
-            <a:pPr algn="ctr">
-              <a:lnSpc>
-                <a:spcPct val="112000"/>
-              </a:lnSpc>
-              <a:spcBef>
-                <a:spcPts val="0"/>
-              </a:spcBef>
-              <a:spcAft>
-                <a:spcPts val="0"/>
-              </a:spcAft>
-            </a:pPr>
-            <a:r>
-              <a:rPr sz="3400" b="1">
-                <a:solidFill>
-                  <a:srgbClr val="E3A93C"/>
-                </a:solidFill>
-                <a:latin typeface="微软雅黑"/>
-              </a:rPr>
-              <a:t>？</a:t>
-            </a:r>
-          </a:p>
-        </p:txBody>
-      </p:sp>
-      <p:sp>
-        <p:nvSpPr>
-          <p:cNvPr id="13" name="Rounded Rectangle 12"/>
-          <p:cNvSpPr/>
-          <p:nvPr/>
-        </p:nvSpPr>
-        <p:spPr>
-          <a:xfrm>
-            <a:off x="566928" y="3429000"/>
-            <a:ext cx="11057839" cy="566928"/>
-          </a:xfrm>
-          <a:prstGeom prst="roundRect">
-            <a:avLst>
-              <a:gd name="adj" fmla="val 14000"/>
-            </a:avLst>
-          </a:prstGeom>
-          <a:solidFill>
-            <a:srgbClr val="FFFFFF"/>
-          </a:solidFill>
-          <a:ln w="9525">
-            <a:solidFill>
-              <a:srgbClr val="DCE5EF"/>
-            </a:solidFill>
-          </a:ln>
-          <a:effectLst/>
-        </p:spPr>
-        <p:style>
-          <a:lnRef idx="1">
-            <a:schemeClr val="accent1"/>
-          </a:lnRef>
-          <a:fillRef idx="3">
-            <a:schemeClr val="accent1"/>
-          </a:fillRef>
-          <a:effectRef idx="2">
-            <a:schemeClr val="accent1"/>
-          </a:effectRef>
-          <a:fontRef idx="minor">
-            <a:schemeClr val="lt1"/>
-          </a:fontRef>
-        </p:style>
-        <p:txBody>
-          <a:bodyPr rtlCol="0" anchor="ctr"/>
-          <a:lstStyle/>
-          <a:p>
-            <a:pPr algn="ctr"/>
-          </a:p>
-        </p:txBody>
-      </p:sp>
-      <p:sp>
-        <p:nvSpPr>
-          <p:cNvPr id="14" name="Oval 13"/>
-          <p:cNvSpPr/>
-          <p:nvPr/>
-        </p:nvSpPr>
-        <p:spPr>
-          <a:xfrm>
-            <a:off x="731520" y="3538728"/>
-            <a:ext cx="347472" cy="347472"/>
-          </a:xfrm>
-          <a:prstGeom prst="ellipse">
-            <a:avLst/>
-          </a:prstGeom>
-          <a:solidFill>
-            <a:srgbClr val="2E9E6B"/>
-          </a:solidFill>
-          <a:ln>
-            <a:noFill/>
-          </a:ln>
-          <a:effectLst/>
-        </p:spPr>
-        <p:style>
-          <a:lnRef idx="1">
-            <a:schemeClr val="accent1"/>
-          </a:lnRef>
-          <a:fillRef idx="3">
-            <a:schemeClr val="accent1"/>
-          </a:fillRef>
-          <a:effectRef idx="2">
-            <a:schemeClr val="accent1"/>
-          </a:effectRef>
-          <a:fontRef idx="minor">
-            <a:schemeClr val="lt1"/>
-          </a:fontRef>
-        </p:style>
-        <p:txBody>
-          <a:bodyPr rtlCol="0" anchor="ctr" lIns="0" rIns="0" tIns="0" bIns="0"/>
-          <a:lstStyle/>
-          <a:p>
-            <a:pPr algn="ctr">
-              <a:lnSpc>
-                <a:spcPct val="112000"/>
-              </a:lnSpc>
-              <a:spcBef>
-                <a:spcPts val="0"/>
-              </a:spcBef>
-              <a:spcAft>
-                <a:spcPts val="0"/>
-              </a:spcAft>
-            </a:pPr>
-            <a:r>
-              <a:rPr sz="1500" b="1">
-                <a:solidFill>
-                  <a:srgbClr val="FFFFFF"/>
-                </a:solidFill>
-                <a:latin typeface="微软雅黑"/>
-              </a:rPr>
-              <a:t>✓</a:t>
-            </a:r>
-          </a:p>
-        </p:txBody>
-      </p:sp>
-      <p:sp>
-        <p:nvSpPr>
-          <p:cNvPr id="15" name="TextBox 14"/>
-          <p:cNvSpPr txBox="1"/>
-          <p:nvPr/>
-        </p:nvSpPr>
-        <p:spPr>
-          <a:xfrm>
-            <a:off x="1252728" y="3483864"/>
-            <a:ext cx="10058400" cy="457200"/>
-          </a:xfrm>
-          <a:prstGeom prst="rect">
-            <a:avLst/>
-          </a:prstGeom>
-          <a:noFill/>
-        </p:spPr>
-        <p:txBody>
-          <a:bodyPr wrap="square" anchor="ctr">
-            <a:spAutoFit/>
-          </a:bodyPr>
-          <a:lstStyle/>
-          <a:p>
-            <a:pPr algn="l">
-              <a:lnSpc>
-                <a:spcPct val="112000"/>
-              </a:lnSpc>
-              <a:spcBef>
-                <a:spcPts val="0"/>
-              </a:spcBef>
-              <a:spcAft>
-                <a:spcPts val="0"/>
-              </a:spcAft>
-            </a:pPr>
-            <a:r>
-              <a:rPr sz="1400" b="1">
-                <a:solidFill>
-                  <a:srgbClr val="1C2B3A"/>
-                </a:solidFill>
-                <a:latin typeface="微软雅黑"/>
-              </a:rPr>
-              <a:t>我懂 TDSQL 的每一个技术细节和运维规范</a:t>
-            </a:r>
-          </a:p>
-        </p:txBody>
-      </p:sp>
-      <p:sp>
-        <p:nvSpPr>
-          <p:cNvPr id="16" name="Rounded Rectangle 15"/>
-          <p:cNvSpPr/>
-          <p:nvPr/>
-        </p:nvSpPr>
-        <p:spPr>
-          <a:xfrm>
-            <a:off x="566928" y="4160520"/>
-            <a:ext cx="11057839" cy="566928"/>
-          </a:xfrm>
-          <a:prstGeom prst="roundRect">
-            <a:avLst>
-              <a:gd name="adj" fmla="val 14000"/>
-            </a:avLst>
-          </a:prstGeom>
-          <a:solidFill>
-            <a:srgbClr val="FFFFFF"/>
-          </a:solidFill>
-          <a:ln w="9525">
-            <a:solidFill>
-              <a:srgbClr val="DCE5EF"/>
-            </a:solidFill>
-          </a:ln>
-          <a:effectLst/>
-        </p:spPr>
-        <p:style>
-          <a:lnRef idx="1">
-            <a:schemeClr val="accent1"/>
-          </a:lnRef>
-          <a:fillRef idx="3">
-            <a:schemeClr val="accent1"/>
-          </a:fillRef>
-          <a:effectRef idx="2">
-            <a:schemeClr val="accent1"/>
-          </a:effectRef>
-          <a:fontRef idx="minor">
-            <a:schemeClr val="lt1"/>
-          </a:fontRef>
-        </p:style>
-        <p:txBody>
-          <a:bodyPr rtlCol="0" anchor="ctr"/>
-          <a:lstStyle/>
-          <a:p>
-            <a:pPr algn="ctr"/>
-          </a:p>
-        </p:txBody>
-      </p:sp>
-      <p:sp>
-        <p:nvSpPr>
-          <p:cNvPr id="17" name="Oval 16"/>
-          <p:cNvSpPr/>
-          <p:nvPr/>
-        </p:nvSpPr>
-        <p:spPr>
-          <a:xfrm>
-            <a:off x="731520" y="4270248"/>
-            <a:ext cx="347472" cy="347472"/>
-          </a:xfrm>
-          <a:prstGeom prst="ellipse">
-            <a:avLst/>
-          </a:prstGeom>
-          <a:solidFill>
-            <a:srgbClr val="2E9E6B"/>
-          </a:solidFill>
-          <a:ln>
-            <a:noFill/>
-          </a:ln>
-          <a:effectLst/>
-        </p:spPr>
-        <p:style>
-          <a:lnRef idx="1">
-            <a:schemeClr val="accent1"/>
-          </a:lnRef>
-          <a:fillRef idx="3">
-            <a:schemeClr val="accent1"/>
-          </a:fillRef>
-          <a:effectRef idx="2">
-            <a:schemeClr val="accent1"/>
-          </a:effectRef>
-          <a:fontRef idx="minor">
-            <a:schemeClr val="lt1"/>
-          </a:fontRef>
-        </p:style>
-        <p:txBody>
-          <a:bodyPr rtlCol="0" anchor="ctr" lIns="0" rIns="0" tIns="0" bIns="0"/>
-          <a:lstStyle/>
-          <a:p>
-            <a:pPr algn="ctr">
-              <a:lnSpc>
-                <a:spcPct val="112000"/>
-              </a:lnSpc>
-              <a:spcBef>
-                <a:spcPts val="0"/>
-              </a:spcBef>
-              <a:spcAft>
-                <a:spcPts val="0"/>
-              </a:spcAft>
-            </a:pPr>
-            <a:r>
-              <a:rPr sz="1500" b="1">
-                <a:solidFill>
-                  <a:srgbClr val="FFFFFF"/>
-                </a:solidFill>
-                <a:latin typeface="微软雅黑"/>
-              </a:rPr>
-              <a:t>✓</a:t>
-            </a:r>
-          </a:p>
-        </p:txBody>
-      </p:sp>
-      <p:sp>
-        <p:nvSpPr>
-          <p:cNvPr id="18" name="TextBox 17"/>
-          <p:cNvSpPr txBox="1"/>
-          <p:nvPr/>
-        </p:nvSpPr>
-        <p:spPr>
-          <a:xfrm>
-            <a:off x="1252728" y="4215384"/>
-            <a:ext cx="10058400" cy="457200"/>
-          </a:xfrm>
-          <a:prstGeom prst="rect">
-            <a:avLst/>
-          </a:prstGeom>
-          <a:noFill/>
-        </p:spPr>
-        <p:txBody>
-          <a:bodyPr wrap="square" anchor="ctr">
-            <a:spAutoFit/>
-          </a:bodyPr>
-          <a:lstStyle/>
-          <a:p>
-            <a:pPr algn="l">
-              <a:lnSpc>
-                <a:spcPct val="112000"/>
-              </a:lnSpc>
-              <a:spcBef>
-                <a:spcPts val="0"/>
-              </a:spcBef>
-              <a:spcAft>
-                <a:spcPts val="0"/>
-              </a:spcAft>
-            </a:pPr>
-            <a:r>
-              <a:rPr sz="1400" b="1">
-                <a:solidFill>
-                  <a:srgbClr val="1C2B3A"/>
-                </a:solidFill>
-                <a:latin typeface="微软雅黑"/>
-              </a:rPr>
-              <a:t>我能设计出完整的审核规则体系和架构方案</a:t>
-            </a:r>
-          </a:p>
-        </p:txBody>
-      </p:sp>
-      <p:sp>
-        <p:nvSpPr>
-          <p:cNvPr id="19" name="Rounded Rectangle 18"/>
-          <p:cNvSpPr/>
-          <p:nvPr/>
-        </p:nvSpPr>
-        <p:spPr>
-          <a:xfrm>
-            <a:off x="566928" y="4892040"/>
-            <a:ext cx="11057839" cy="566928"/>
-          </a:xfrm>
-          <a:prstGeom prst="roundRect">
-            <a:avLst>
-              <a:gd name="adj" fmla="val 14000"/>
-            </a:avLst>
-          </a:prstGeom>
-          <a:solidFill>
-            <a:srgbClr val="FFFFFF"/>
-          </a:solidFill>
-          <a:ln w="9525">
-            <a:solidFill>
-              <a:srgbClr val="DCE5EF"/>
-            </a:solidFill>
-          </a:ln>
-          <a:effectLst/>
-        </p:spPr>
-        <p:style>
-          <a:lnRef idx="1">
-            <a:schemeClr val="accent1"/>
-          </a:lnRef>
-          <a:fillRef idx="3">
-            <a:schemeClr val="accent1"/>
-          </a:fillRef>
-          <a:effectRef idx="2">
-            <a:schemeClr val="accent1"/>
-          </a:effectRef>
-          <a:fontRef idx="minor">
-            <a:schemeClr val="lt1"/>
-          </a:fontRef>
-        </p:style>
-        <p:txBody>
-          <a:bodyPr rtlCol="0" anchor="ctr"/>
-          <a:lstStyle/>
-          <a:p>
-            <a:pPr algn="ctr"/>
-          </a:p>
-        </p:txBody>
-      </p:sp>
-      <p:sp>
-        <p:nvSpPr>
-          <p:cNvPr id="20" name="Oval 19"/>
-          <p:cNvSpPr/>
-          <p:nvPr/>
-        </p:nvSpPr>
-        <p:spPr>
-          <a:xfrm>
-            <a:off x="731520" y="5001768"/>
-            <a:ext cx="347472" cy="347472"/>
-          </a:xfrm>
-          <a:prstGeom prst="ellipse">
-            <a:avLst/>
-          </a:prstGeom>
-          <a:solidFill>
-            <a:srgbClr val="2E9E6B"/>
-          </a:solidFill>
-          <a:ln>
-            <a:noFill/>
-          </a:ln>
-          <a:effectLst/>
-        </p:spPr>
-        <p:style>
-          <a:lnRef idx="1">
-            <a:schemeClr val="accent1"/>
-          </a:lnRef>
-          <a:fillRef idx="3">
-            <a:schemeClr val="accent1"/>
-          </a:fillRef>
-          <a:effectRef idx="2">
-            <a:schemeClr val="accent1"/>
-          </a:effectRef>
-          <a:fontRef idx="minor">
-            <a:schemeClr val="lt1"/>
-          </a:fontRef>
-        </p:style>
-        <p:txBody>
-          <a:bodyPr rtlCol="0" anchor="ctr" lIns="0" rIns="0" tIns="0" bIns="0"/>
-          <a:lstStyle/>
-          <a:p>
-            <a:pPr algn="ctr">
-              <a:lnSpc>
-                <a:spcPct val="112000"/>
-              </a:lnSpc>
-              <a:spcBef>
-                <a:spcPts val="0"/>
-              </a:spcBef>
-              <a:spcAft>
-                <a:spcPts val="0"/>
-              </a:spcAft>
-            </a:pPr>
-            <a:r>
-              <a:rPr sz="1500" b="1">
-                <a:solidFill>
-                  <a:srgbClr val="FFFFFF"/>
-                </a:solidFill>
-                <a:latin typeface="微软雅黑"/>
-              </a:rPr>
-              <a:t>✓</a:t>
-            </a:r>
-          </a:p>
-        </p:txBody>
-      </p:sp>
-      <p:sp>
-        <p:nvSpPr>
-          <p:cNvPr id="21" name="TextBox 20"/>
-          <p:cNvSpPr txBox="1"/>
-          <p:nvPr/>
-        </p:nvSpPr>
-        <p:spPr>
-          <a:xfrm>
-            <a:off x="1252728" y="4946904"/>
-            <a:ext cx="10058400" cy="457200"/>
-          </a:xfrm>
-          <a:prstGeom prst="rect">
-            <a:avLst/>
-          </a:prstGeom>
-          <a:noFill/>
-        </p:spPr>
-        <p:txBody>
-          <a:bodyPr wrap="square" anchor="ctr">
-            <a:spAutoFit/>
-          </a:bodyPr>
-          <a:lstStyle/>
-          <a:p>
-            <a:pPr algn="l">
-              <a:lnSpc>
-                <a:spcPct val="112000"/>
-              </a:lnSpc>
-              <a:spcBef>
-                <a:spcPts val="0"/>
-              </a:spcBef>
-              <a:spcAft>
-                <a:spcPts val="0"/>
-              </a:spcAft>
-            </a:pPr>
-            <a:r>
-              <a:rPr sz="1400" b="1">
-                <a:solidFill>
-                  <a:srgbClr val="1C2B3A"/>
-                </a:solidFill>
-                <a:latin typeface="微软雅黑"/>
-              </a:rPr>
-              <a:t>AI 工具可以把我的设计思想转化为可运行的代码</a:t>
-            </a:r>
-          </a:p>
-        </p:txBody>
-      </p:sp>
-      <p:sp>
-        <p:nvSpPr>
-          <p:cNvPr id="22" name="Rounded Rectangle 21"/>
-          <p:cNvSpPr/>
-          <p:nvPr/>
-        </p:nvSpPr>
-        <p:spPr>
-          <a:xfrm>
-            <a:off x="566928" y="5623560"/>
-            <a:ext cx="11057839" cy="685800"/>
-          </a:xfrm>
-          <a:prstGeom prst="roundRect">
-            <a:avLst>
-              <a:gd name="adj" fmla="val 12000"/>
-            </a:avLst>
-          </a:prstGeom>
-          <a:solidFill>
-            <a:srgbClr val="FBF3E1"/>
-          </a:solidFill>
-          <a:ln>
-            <a:noFill/>
-          </a:ln>
-          <a:effectLst/>
-        </p:spPr>
-        <p:style>
-          <a:lnRef idx="1">
-            <a:schemeClr val="accent1"/>
-          </a:lnRef>
-          <a:fillRef idx="3">
-            <a:schemeClr val="accent1"/>
-          </a:fillRef>
-          <a:effectRef idx="2">
-            <a:schemeClr val="accent1"/>
-          </a:effectRef>
-          <a:fontRef idx="minor">
-            <a:schemeClr val="lt1"/>
-          </a:fontRef>
-        </p:style>
-        <p:txBody>
-          <a:bodyPr rtlCol="0" anchor="ctr" wrap="square" lIns="127000" rIns="127000" tIns="88900" bIns="88900"/>
-          <a:lstStyle/>
-          <a:p>
-            <a:pPr algn="ctr">
-              <a:lnSpc>
-                <a:spcPct val="112000"/>
-              </a:lnSpc>
-              <a:spcBef>
-                <a:spcPts val="0"/>
-              </a:spcBef>
-              <a:spcAft>
-                <a:spcPts val="0"/>
-              </a:spcAft>
-            </a:pPr>
-            <a:r>
-              <a:rPr sz="1600" b="1">
-                <a:solidFill>
-                  <a:srgbClr val="E3A93C"/>
-                </a:solidFill>
-                <a:latin typeface="微软雅黑"/>
-              </a:rPr>
               <a:t>大胆假设：</a:t>
             </a:r>
             <a:r>
-              <a:rPr sz="1600" b="1">
+              <a:rPr sz="1550" b="1">
                 <a:solidFill>
                   <a:srgbClr val="0E2239"/>
                 </a:solidFill>
                 <a:latin typeface="微软雅黑"/>
               </a:rPr>
-              <a:t>一个人 + AI 工具 = 一个完整的生产力团队</a:t>
+              <a:t>我懂 TDSQL 与运维规范，AI 有编程能力 —— 一个人 + AI 工具 = 一个完整的生产力团队</a:t>
             </a:r>
           </a:p>
         </p:txBody>
